--- a/Chap/Prog03/Presentations/Recursion.pptx
+++ b/Chap/Prog03/Presentations/Recursion.pptx
@@ -194,10 +194,9 @@
           </a:lstStyle>
           <a:p>
             <a:r>
-              <a:rPr lang="da-DK" smtClean="0"/>
+              <a:rPr lang="da-DK"/>
               <a:t>Klik for at redigere i master</a:t>
             </a:r>
-            <a:endParaRPr lang="da-DK"/>
           </a:p>
         </p:txBody>
       </p:sp>
@@ -259,10 +258,9 @@
           </a:lstStyle>
           <a:p>
             <a:r>
-              <a:rPr lang="da-DK" smtClean="0"/>
+              <a:rPr lang="da-DK"/>
               <a:t>Klik for at redigere undertiteltypografien i masteren</a:t>
             </a:r>
-            <a:endParaRPr lang="da-DK"/>
           </a:p>
         </p:txBody>
       </p:sp>
@@ -283,7 +281,7 @@
           <a:p>
             <a:fld id="{E15B7D8E-2A20-4C0E-991C-872DBB7459A8}" type="datetimeFigureOut">
               <a:rPr lang="da-DK" smtClean="0"/>
-              <a:t>19-09-2018</a:t>
+              <a:t>10-02-2025</a:t>
             </a:fld>
             <a:endParaRPr lang="da-DK"/>
           </a:p>
@@ -377,10 +375,9 @@
           <a:lstStyle/>
           <a:p>
             <a:r>
-              <a:rPr lang="da-DK" smtClean="0"/>
+              <a:rPr lang="da-DK"/>
               <a:t>Klik for at redigere i master</a:t>
             </a:r>
-            <a:endParaRPr lang="da-DK"/>
           </a:p>
         </p:txBody>
       </p:sp>
@@ -401,38 +398,37 @@
           <a:p>
             <a:pPr lvl="0"/>
             <a:r>
-              <a:rPr lang="da-DK" smtClean="0"/>
+              <a:rPr lang="da-DK"/>
               <a:t>Rediger typografien i masterens</a:t>
             </a:r>
           </a:p>
           <a:p>
             <a:pPr lvl="1"/>
             <a:r>
-              <a:rPr lang="da-DK" smtClean="0"/>
+              <a:rPr lang="da-DK"/>
               <a:t>Andet niveau</a:t>
             </a:r>
           </a:p>
           <a:p>
             <a:pPr lvl="2"/>
             <a:r>
-              <a:rPr lang="da-DK" smtClean="0"/>
+              <a:rPr lang="da-DK"/>
               <a:t>Tredje niveau</a:t>
             </a:r>
           </a:p>
           <a:p>
             <a:pPr lvl="3"/>
             <a:r>
-              <a:rPr lang="da-DK" smtClean="0"/>
+              <a:rPr lang="da-DK"/>
               <a:t>Fjerde niveau</a:t>
             </a:r>
           </a:p>
           <a:p>
             <a:pPr lvl="4"/>
             <a:r>
-              <a:rPr lang="da-DK" smtClean="0"/>
+              <a:rPr lang="da-DK"/>
               <a:t>Femte niveau</a:t>
             </a:r>
-            <a:endParaRPr lang="da-DK"/>
           </a:p>
         </p:txBody>
       </p:sp>
@@ -453,7 +449,7 @@
           <a:p>
             <a:fld id="{E15B7D8E-2A20-4C0E-991C-872DBB7459A8}" type="datetimeFigureOut">
               <a:rPr lang="da-DK" smtClean="0"/>
-              <a:t>19-09-2018</a:t>
+              <a:t>10-02-2025</a:t>
             </a:fld>
             <a:endParaRPr lang="da-DK"/>
           </a:p>
@@ -552,10 +548,9 @@
           <a:lstStyle/>
           <a:p>
             <a:r>
-              <a:rPr lang="da-DK" smtClean="0"/>
+              <a:rPr lang="da-DK"/>
               <a:t>Klik for at redigere i master</a:t>
             </a:r>
-            <a:endParaRPr lang="da-DK"/>
           </a:p>
         </p:txBody>
       </p:sp>
@@ -581,38 +576,37 @@
           <a:p>
             <a:pPr lvl="0"/>
             <a:r>
-              <a:rPr lang="da-DK" smtClean="0"/>
+              <a:rPr lang="da-DK"/>
               <a:t>Rediger typografien i masterens</a:t>
             </a:r>
           </a:p>
           <a:p>
             <a:pPr lvl="1"/>
             <a:r>
-              <a:rPr lang="da-DK" smtClean="0"/>
+              <a:rPr lang="da-DK"/>
               <a:t>Andet niveau</a:t>
             </a:r>
           </a:p>
           <a:p>
             <a:pPr lvl="2"/>
             <a:r>
-              <a:rPr lang="da-DK" smtClean="0"/>
+              <a:rPr lang="da-DK"/>
               <a:t>Tredje niveau</a:t>
             </a:r>
           </a:p>
           <a:p>
             <a:pPr lvl="3"/>
             <a:r>
-              <a:rPr lang="da-DK" smtClean="0"/>
+              <a:rPr lang="da-DK"/>
               <a:t>Fjerde niveau</a:t>
             </a:r>
           </a:p>
           <a:p>
             <a:pPr lvl="4"/>
             <a:r>
-              <a:rPr lang="da-DK" smtClean="0"/>
+              <a:rPr lang="da-DK"/>
               <a:t>Femte niveau</a:t>
             </a:r>
-            <a:endParaRPr lang="da-DK"/>
           </a:p>
         </p:txBody>
       </p:sp>
@@ -633,7 +627,7 @@
           <a:p>
             <a:fld id="{E15B7D8E-2A20-4C0E-991C-872DBB7459A8}" type="datetimeFigureOut">
               <a:rPr lang="da-DK" smtClean="0"/>
-              <a:t>19-09-2018</a:t>
+              <a:t>10-02-2025</a:t>
             </a:fld>
             <a:endParaRPr lang="da-DK"/>
           </a:p>
@@ -727,10 +721,9 @@
           <a:lstStyle/>
           <a:p>
             <a:r>
-              <a:rPr lang="da-DK" smtClean="0"/>
+              <a:rPr lang="da-DK"/>
               <a:t>Klik for at redigere i master</a:t>
             </a:r>
-            <a:endParaRPr lang="da-DK"/>
           </a:p>
         </p:txBody>
       </p:sp>
@@ -751,38 +744,37 @@
           <a:p>
             <a:pPr lvl="0"/>
             <a:r>
-              <a:rPr lang="da-DK" smtClean="0"/>
+              <a:rPr lang="da-DK"/>
               <a:t>Rediger typografien i masterens</a:t>
             </a:r>
           </a:p>
           <a:p>
             <a:pPr lvl="1"/>
             <a:r>
-              <a:rPr lang="da-DK" smtClean="0"/>
+              <a:rPr lang="da-DK"/>
               <a:t>Andet niveau</a:t>
             </a:r>
           </a:p>
           <a:p>
             <a:pPr lvl="2"/>
             <a:r>
-              <a:rPr lang="da-DK" smtClean="0"/>
+              <a:rPr lang="da-DK"/>
               <a:t>Tredje niveau</a:t>
             </a:r>
           </a:p>
           <a:p>
             <a:pPr lvl="3"/>
             <a:r>
-              <a:rPr lang="da-DK" smtClean="0"/>
+              <a:rPr lang="da-DK"/>
               <a:t>Fjerde niveau</a:t>
             </a:r>
           </a:p>
           <a:p>
             <a:pPr lvl="4"/>
             <a:r>
-              <a:rPr lang="da-DK" smtClean="0"/>
+              <a:rPr lang="da-DK"/>
               <a:t>Femte niveau</a:t>
             </a:r>
-            <a:endParaRPr lang="da-DK"/>
           </a:p>
         </p:txBody>
       </p:sp>
@@ -803,7 +795,7 @@
           <a:p>
             <a:fld id="{E15B7D8E-2A20-4C0E-991C-872DBB7459A8}" type="datetimeFigureOut">
               <a:rPr lang="da-DK" smtClean="0"/>
-              <a:t>19-09-2018</a:t>
+              <a:t>10-02-2025</a:t>
             </a:fld>
             <a:endParaRPr lang="da-DK"/>
           </a:p>
@@ -906,10 +898,9 @@
           </a:lstStyle>
           <a:p>
             <a:r>
-              <a:rPr lang="da-DK" smtClean="0"/>
+              <a:rPr lang="da-DK"/>
               <a:t>Klik for at redigere i master</a:t>
             </a:r>
-            <a:endParaRPr lang="da-DK"/>
           </a:p>
         </p:txBody>
       </p:sp>
@@ -1026,7 +1017,7 @@
           <a:p>
             <a:pPr lvl="0"/>
             <a:r>
-              <a:rPr lang="da-DK" smtClean="0"/>
+              <a:rPr lang="da-DK"/>
               <a:t>Rediger typografien i masterens</a:t>
             </a:r>
           </a:p>
@@ -1049,7 +1040,7 @@
           <a:p>
             <a:fld id="{E15B7D8E-2A20-4C0E-991C-872DBB7459A8}" type="datetimeFigureOut">
               <a:rPr lang="da-DK" smtClean="0"/>
-              <a:t>19-09-2018</a:t>
+              <a:t>10-02-2025</a:t>
             </a:fld>
             <a:endParaRPr lang="da-DK"/>
           </a:p>
@@ -1143,10 +1134,9 @@
           <a:lstStyle/>
           <a:p>
             <a:r>
-              <a:rPr lang="da-DK" smtClean="0"/>
+              <a:rPr lang="da-DK"/>
               <a:t>Klik for at redigere i master</a:t>
             </a:r>
-            <a:endParaRPr lang="da-DK"/>
           </a:p>
         </p:txBody>
       </p:sp>
@@ -1172,38 +1162,37 @@
           <a:p>
             <a:pPr lvl="0"/>
             <a:r>
-              <a:rPr lang="da-DK" smtClean="0"/>
+              <a:rPr lang="da-DK"/>
               <a:t>Rediger typografien i masterens</a:t>
             </a:r>
           </a:p>
           <a:p>
             <a:pPr lvl="1"/>
             <a:r>
-              <a:rPr lang="da-DK" smtClean="0"/>
+              <a:rPr lang="da-DK"/>
               <a:t>Andet niveau</a:t>
             </a:r>
           </a:p>
           <a:p>
             <a:pPr lvl="2"/>
             <a:r>
-              <a:rPr lang="da-DK" smtClean="0"/>
+              <a:rPr lang="da-DK"/>
               <a:t>Tredje niveau</a:t>
             </a:r>
           </a:p>
           <a:p>
             <a:pPr lvl="3"/>
             <a:r>
-              <a:rPr lang="da-DK" smtClean="0"/>
+              <a:rPr lang="da-DK"/>
               <a:t>Fjerde niveau</a:t>
             </a:r>
           </a:p>
           <a:p>
             <a:pPr lvl="4"/>
             <a:r>
-              <a:rPr lang="da-DK" smtClean="0"/>
+              <a:rPr lang="da-DK"/>
               <a:t>Femte niveau</a:t>
             </a:r>
-            <a:endParaRPr lang="da-DK"/>
           </a:p>
         </p:txBody>
       </p:sp>
@@ -1229,38 +1218,37 @@
           <a:p>
             <a:pPr lvl="0"/>
             <a:r>
-              <a:rPr lang="da-DK" smtClean="0"/>
+              <a:rPr lang="da-DK"/>
               <a:t>Rediger typografien i masterens</a:t>
             </a:r>
           </a:p>
           <a:p>
             <a:pPr lvl="1"/>
             <a:r>
-              <a:rPr lang="da-DK" smtClean="0"/>
+              <a:rPr lang="da-DK"/>
               <a:t>Andet niveau</a:t>
             </a:r>
           </a:p>
           <a:p>
             <a:pPr lvl="2"/>
             <a:r>
-              <a:rPr lang="da-DK" smtClean="0"/>
+              <a:rPr lang="da-DK"/>
               <a:t>Tredje niveau</a:t>
             </a:r>
           </a:p>
           <a:p>
             <a:pPr lvl="3"/>
             <a:r>
-              <a:rPr lang="da-DK" smtClean="0"/>
+              <a:rPr lang="da-DK"/>
               <a:t>Fjerde niveau</a:t>
             </a:r>
           </a:p>
           <a:p>
             <a:pPr lvl="4"/>
             <a:r>
-              <a:rPr lang="da-DK" smtClean="0"/>
+              <a:rPr lang="da-DK"/>
               <a:t>Femte niveau</a:t>
             </a:r>
-            <a:endParaRPr lang="da-DK"/>
           </a:p>
         </p:txBody>
       </p:sp>
@@ -1281,7 +1269,7 @@
           <a:p>
             <a:fld id="{E15B7D8E-2A20-4C0E-991C-872DBB7459A8}" type="datetimeFigureOut">
               <a:rPr lang="da-DK" smtClean="0"/>
-              <a:t>19-09-2018</a:t>
+              <a:t>10-02-2025</a:t>
             </a:fld>
             <a:endParaRPr lang="da-DK"/>
           </a:p>
@@ -1380,10 +1368,9 @@
           <a:lstStyle/>
           <a:p>
             <a:r>
-              <a:rPr lang="da-DK" smtClean="0"/>
+              <a:rPr lang="da-DK"/>
               <a:t>Klik for at redigere i master</a:t>
             </a:r>
-            <a:endParaRPr lang="da-DK"/>
           </a:p>
         </p:txBody>
       </p:sp>
@@ -1446,7 +1433,7 @@
           <a:p>
             <a:pPr lvl="0"/>
             <a:r>
-              <a:rPr lang="da-DK" smtClean="0"/>
+              <a:rPr lang="da-DK"/>
               <a:t>Rediger typografien i masterens</a:t>
             </a:r>
           </a:p>
@@ -1474,38 +1461,37 @@
           <a:p>
             <a:pPr lvl="0"/>
             <a:r>
-              <a:rPr lang="da-DK" smtClean="0"/>
+              <a:rPr lang="da-DK"/>
               <a:t>Rediger typografien i masterens</a:t>
             </a:r>
           </a:p>
           <a:p>
             <a:pPr lvl="1"/>
             <a:r>
-              <a:rPr lang="da-DK" smtClean="0"/>
+              <a:rPr lang="da-DK"/>
               <a:t>Andet niveau</a:t>
             </a:r>
           </a:p>
           <a:p>
             <a:pPr lvl="2"/>
             <a:r>
-              <a:rPr lang="da-DK" smtClean="0"/>
+              <a:rPr lang="da-DK"/>
               <a:t>Tredje niveau</a:t>
             </a:r>
           </a:p>
           <a:p>
             <a:pPr lvl="3"/>
             <a:r>
-              <a:rPr lang="da-DK" smtClean="0"/>
+              <a:rPr lang="da-DK"/>
               <a:t>Fjerde niveau</a:t>
             </a:r>
           </a:p>
           <a:p>
             <a:pPr lvl="4"/>
             <a:r>
-              <a:rPr lang="da-DK" smtClean="0"/>
+              <a:rPr lang="da-DK"/>
               <a:t>Femte niveau</a:t>
             </a:r>
-            <a:endParaRPr lang="da-DK"/>
           </a:p>
         </p:txBody>
       </p:sp>
@@ -1568,7 +1554,7 @@
           <a:p>
             <a:pPr lvl="0"/>
             <a:r>
-              <a:rPr lang="da-DK" smtClean="0"/>
+              <a:rPr lang="da-DK"/>
               <a:t>Rediger typografien i masterens</a:t>
             </a:r>
           </a:p>
@@ -1596,38 +1582,37 @@
           <a:p>
             <a:pPr lvl="0"/>
             <a:r>
-              <a:rPr lang="da-DK" smtClean="0"/>
+              <a:rPr lang="da-DK"/>
               <a:t>Rediger typografien i masterens</a:t>
             </a:r>
           </a:p>
           <a:p>
             <a:pPr lvl="1"/>
             <a:r>
-              <a:rPr lang="da-DK" smtClean="0"/>
+              <a:rPr lang="da-DK"/>
               <a:t>Andet niveau</a:t>
             </a:r>
           </a:p>
           <a:p>
             <a:pPr lvl="2"/>
             <a:r>
-              <a:rPr lang="da-DK" smtClean="0"/>
+              <a:rPr lang="da-DK"/>
               <a:t>Tredje niveau</a:t>
             </a:r>
           </a:p>
           <a:p>
             <a:pPr lvl="3"/>
             <a:r>
-              <a:rPr lang="da-DK" smtClean="0"/>
+              <a:rPr lang="da-DK"/>
               <a:t>Fjerde niveau</a:t>
             </a:r>
           </a:p>
           <a:p>
             <a:pPr lvl="4"/>
             <a:r>
-              <a:rPr lang="da-DK" smtClean="0"/>
+              <a:rPr lang="da-DK"/>
               <a:t>Femte niveau</a:t>
             </a:r>
-            <a:endParaRPr lang="da-DK"/>
           </a:p>
         </p:txBody>
       </p:sp>
@@ -1648,7 +1633,7 @@
           <a:p>
             <a:fld id="{E15B7D8E-2A20-4C0E-991C-872DBB7459A8}" type="datetimeFigureOut">
               <a:rPr lang="da-DK" smtClean="0"/>
-              <a:t>19-09-2018</a:t>
+              <a:t>10-02-2025</a:t>
             </a:fld>
             <a:endParaRPr lang="da-DK"/>
           </a:p>
@@ -1742,10 +1727,9 @@
           <a:lstStyle/>
           <a:p>
             <a:r>
-              <a:rPr lang="da-DK" smtClean="0"/>
+              <a:rPr lang="da-DK"/>
               <a:t>Klik for at redigere i master</a:t>
             </a:r>
-            <a:endParaRPr lang="da-DK"/>
           </a:p>
         </p:txBody>
       </p:sp>
@@ -1766,7 +1750,7 @@
           <a:p>
             <a:fld id="{E15B7D8E-2A20-4C0E-991C-872DBB7459A8}" type="datetimeFigureOut">
               <a:rPr lang="da-DK" smtClean="0"/>
-              <a:t>19-09-2018</a:t>
+              <a:t>10-02-2025</a:t>
             </a:fld>
             <a:endParaRPr lang="da-DK"/>
           </a:p>
@@ -1861,7 +1845,7 @@
           <a:p>
             <a:fld id="{E15B7D8E-2A20-4C0E-991C-872DBB7459A8}" type="datetimeFigureOut">
               <a:rPr lang="da-DK" smtClean="0"/>
-              <a:t>19-09-2018</a:t>
+              <a:t>10-02-2025</a:t>
             </a:fld>
             <a:endParaRPr lang="da-DK"/>
           </a:p>
@@ -1964,10 +1948,9 @@
           </a:lstStyle>
           <a:p>
             <a:r>
-              <a:rPr lang="da-DK" smtClean="0"/>
+              <a:rPr lang="da-DK"/>
               <a:t>Klik for at redigere i master</a:t>
             </a:r>
-            <a:endParaRPr lang="da-DK"/>
           </a:p>
         </p:txBody>
       </p:sp>
@@ -2021,38 +2004,37 @@
           <a:p>
             <a:pPr lvl="0"/>
             <a:r>
-              <a:rPr lang="da-DK" smtClean="0"/>
+              <a:rPr lang="da-DK"/>
               <a:t>Rediger typografien i masterens</a:t>
             </a:r>
           </a:p>
           <a:p>
             <a:pPr lvl="1"/>
             <a:r>
-              <a:rPr lang="da-DK" smtClean="0"/>
+              <a:rPr lang="da-DK"/>
               <a:t>Andet niveau</a:t>
             </a:r>
           </a:p>
           <a:p>
             <a:pPr lvl="2"/>
             <a:r>
-              <a:rPr lang="da-DK" smtClean="0"/>
+              <a:rPr lang="da-DK"/>
               <a:t>Tredje niveau</a:t>
             </a:r>
           </a:p>
           <a:p>
             <a:pPr lvl="3"/>
             <a:r>
-              <a:rPr lang="da-DK" smtClean="0"/>
+              <a:rPr lang="da-DK"/>
               <a:t>Fjerde niveau</a:t>
             </a:r>
           </a:p>
           <a:p>
             <a:pPr lvl="4"/>
             <a:r>
-              <a:rPr lang="da-DK" smtClean="0"/>
+              <a:rPr lang="da-DK"/>
               <a:t>Femte niveau</a:t>
             </a:r>
-            <a:endParaRPr lang="da-DK"/>
           </a:p>
         </p:txBody>
       </p:sp>
@@ -2115,7 +2097,7 @@
           <a:p>
             <a:pPr lvl="0"/>
             <a:r>
-              <a:rPr lang="da-DK" smtClean="0"/>
+              <a:rPr lang="da-DK"/>
               <a:t>Rediger typografien i masterens</a:t>
             </a:r>
           </a:p>
@@ -2138,7 +2120,7 @@
           <a:p>
             <a:fld id="{E15B7D8E-2A20-4C0E-991C-872DBB7459A8}" type="datetimeFigureOut">
               <a:rPr lang="da-DK" smtClean="0"/>
-              <a:t>19-09-2018</a:t>
+              <a:t>10-02-2025</a:t>
             </a:fld>
             <a:endParaRPr lang="da-DK"/>
           </a:p>
@@ -2241,10 +2223,9 @@
           </a:lstStyle>
           <a:p>
             <a:r>
-              <a:rPr lang="da-DK" smtClean="0"/>
+              <a:rPr lang="da-DK"/>
               <a:t>Klik for at redigere i master</a:t>
             </a:r>
-            <a:endParaRPr lang="da-DK"/>
           </a:p>
         </p:txBody>
       </p:sp>
@@ -2368,7 +2349,7 @@
           <a:p>
             <a:pPr lvl="0"/>
             <a:r>
-              <a:rPr lang="da-DK" smtClean="0"/>
+              <a:rPr lang="da-DK"/>
               <a:t>Rediger typografien i masterens</a:t>
             </a:r>
           </a:p>
@@ -2391,7 +2372,7 @@
           <a:p>
             <a:fld id="{E15B7D8E-2A20-4C0E-991C-872DBB7459A8}" type="datetimeFigureOut">
               <a:rPr lang="da-DK" smtClean="0"/>
-              <a:t>19-09-2018</a:t>
+              <a:t>10-02-2025</a:t>
             </a:fld>
             <a:endParaRPr lang="da-DK"/>
           </a:p>
@@ -2500,10 +2481,9 @@
           <a:lstStyle/>
           <a:p>
             <a:r>
-              <a:rPr lang="da-DK" smtClean="0"/>
+              <a:rPr lang="da-DK"/>
               <a:t>Klik for at redigere i master</a:t>
             </a:r>
-            <a:endParaRPr lang="da-DK"/>
           </a:p>
         </p:txBody>
       </p:sp>
@@ -2534,38 +2514,37 @@
           <a:p>
             <a:pPr lvl="0"/>
             <a:r>
-              <a:rPr lang="da-DK" smtClean="0"/>
+              <a:rPr lang="da-DK"/>
               <a:t>Rediger typografien i masterens</a:t>
             </a:r>
           </a:p>
           <a:p>
             <a:pPr lvl="1"/>
             <a:r>
-              <a:rPr lang="da-DK" smtClean="0"/>
+              <a:rPr lang="da-DK"/>
               <a:t>Andet niveau</a:t>
             </a:r>
           </a:p>
           <a:p>
             <a:pPr lvl="2"/>
             <a:r>
-              <a:rPr lang="da-DK" smtClean="0"/>
+              <a:rPr lang="da-DK"/>
               <a:t>Tredje niveau</a:t>
             </a:r>
           </a:p>
           <a:p>
             <a:pPr lvl="3"/>
             <a:r>
-              <a:rPr lang="da-DK" smtClean="0"/>
+              <a:rPr lang="da-DK"/>
               <a:t>Fjerde niveau</a:t>
             </a:r>
           </a:p>
           <a:p>
             <a:pPr lvl="4"/>
             <a:r>
-              <a:rPr lang="da-DK" smtClean="0"/>
+              <a:rPr lang="da-DK"/>
               <a:t>Femte niveau</a:t>
             </a:r>
-            <a:endParaRPr lang="da-DK"/>
           </a:p>
         </p:txBody>
       </p:sp>
@@ -2604,7 +2583,7 @@
           <a:p>
             <a:fld id="{E15B7D8E-2A20-4C0E-991C-872DBB7459A8}" type="datetimeFigureOut">
               <a:rPr lang="da-DK" smtClean="0"/>
-              <a:t>19-09-2018</a:t>
+              <a:t>10-02-2025</a:t>
             </a:fld>
             <a:endParaRPr lang="da-DK"/>
           </a:p>
@@ -3032,10 +3011,9 @@
           <a:lstStyle/>
           <a:p>
             <a:r>
-              <a:rPr lang="da-DK" sz="9600" smtClean="0"/>
+              <a:rPr lang="da-DK" sz="9600"/>
               <a:t>Recursion</a:t>
             </a:r>
-            <a:endParaRPr lang="da-DK" sz="9600"/>
           </a:p>
         </p:txBody>
       </p:sp>
@@ -3049,13 +3027,6 @@
   <p:clrMapOvr>
     <a:masterClrMapping/>
   </p:clrMapOvr>
-  <p:timing>
-    <p:tnLst>
-      <p:par>
-        <p:cTn id="1" dur="indefinite" restart="never" nodeType="tmRoot"/>
-      </p:par>
-    </p:tnLst>
-  </p:timing>
 </p:sld>
 </file>
 
@@ -3105,7 +3076,7 @@
               <a:buNone/>
             </a:pPr>
             <a:r>
-              <a:rPr lang="en-US" sz="2400" b="1" smtClean="0">
+              <a:rPr lang="en-US" sz="2400" b="1">
                 <a:solidFill>
                   <a:srgbClr val="0070C0"/>
                 </a:solidFill>
@@ -3114,13 +3085,13 @@
               <a:t>public int </a:t>
             </a:r>
             <a:r>
-              <a:rPr lang="en-US" sz="2400" b="1" smtClean="0">
+              <a:rPr lang="en-US" sz="2400" b="1">
                 <a:latin typeface="Consolas" panose="020B0609020204030204" pitchFamily="49" charset="0"/>
               </a:rPr>
               <a:t>Factorial(</a:t>
             </a:r>
             <a:r>
-              <a:rPr lang="en-US" sz="2400" b="1" smtClean="0">
+              <a:rPr lang="en-US" sz="2400" b="1">
                 <a:solidFill>
                   <a:srgbClr val="0070C0"/>
                 </a:solidFill>
@@ -3129,7 +3100,7 @@
               <a:t>int</a:t>
             </a:r>
             <a:r>
-              <a:rPr lang="en-US" sz="2400" b="1" smtClean="0">
+              <a:rPr lang="en-US" sz="2400" b="1">
                 <a:latin typeface="Consolas" panose="020B0609020204030204" pitchFamily="49" charset="0"/>
               </a:rPr>
               <a:t> n)</a:t>
@@ -3146,7 +3117,7 @@
               <a:buNone/>
             </a:pPr>
             <a:r>
-              <a:rPr lang="en-US" sz="2400" b="1" smtClean="0">
+              <a:rPr lang="en-US" sz="2400" b="1">
                 <a:latin typeface="Consolas" panose="020B0609020204030204" pitchFamily="49" charset="0"/>
               </a:rPr>
               <a:t>{</a:t>
@@ -3163,16 +3134,10 @@
               <a:rPr lang="en-US" sz="2400" b="1">
                 <a:latin typeface="Consolas" panose="020B0609020204030204" pitchFamily="49" charset="0"/>
               </a:rPr>
-              <a:t> </a:t>
-            </a:r>
-            <a:r>
-              <a:rPr lang="en-US" sz="2400" b="1" smtClean="0">
-                <a:latin typeface="Consolas" panose="020B0609020204030204" pitchFamily="49" charset="0"/>
-              </a:rPr>
-              <a:t>   </a:t>
-            </a:r>
-            <a:r>
-              <a:rPr lang="en-US" sz="2400" b="1" smtClean="0">
+              <a:t>    </a:t>
+            </a:r>
+            <a:r>
+              <a:rPr lang="en-US" sz="2400" b="1">
                 <a:solidFill>
                   <a:srgbClr val="0070C0"/>
                 </a:solidFill>
@@ -3181,7 +3146,7 @@
               <a:t>return</a:t>
             </a:r>
             <a:r>
-              <a:rPr lang="en-US" sz="2400" b="1" smtClean="0">
+              <a:rPr lang="en-US" sz="2400" b="1">
                 <a:latin typeface="Consolas" panose="020B0609020204030204" pitchFamily="49" charset="0"/>
               </a:rPr>
               <a:t> (n &lt;= 1) ? 1 : (n * Factorial(n – 1));</a:t>
@@ -3195,7 +3160,7 @@
               <a:buNone/>
             </a:pPr>
             <a:r>
-              <a:rPr lang="en-US" sz="2400" b="1" smtClean="0">
+              <a:rPr lang="en-US" sz="2400" b="1">
                 <a:latin typeface="Consolas" panose="020B0609020204030204" pitchFamily="49" charset="0"/>
               </a:rPr>
               <a:t>}</a:t>
@@ -3219,7 +3184,7 @@
             <a:pPr marL="0" indent="0">
               <a:buNone/>
             </a:pPr>
-            <a:endParaRPr lang="da-DK" sz="2000" b="1" smtClean="0">
+            <a:endParaRPr lang="da-DK" sz="2000" b="1">
               <a:solidFill>
                 <a:srgbClr val="0070C0"/>
               </a:solidFill>
@@ -3238,13 +3203,6 @@
   <p:clrMapOvr>
     <a:masterClrMapping/>
   </p:clrMapOvr>
-  <p:timing>
-    <p:tnLst>
-      <p:par>
-        <p:cTn id="1" dur="indefinite" restart="never" nodeType="tmRoot"/>
-      </p:par>
-    </p:tnLst>
-  </p:timing>
 </p:sld>
 </file>
 
@@ -3294,7 +3252,7 @@
               <a:buNone/>
             </a:pPr>
             <a:r>
-              <a:rPr lang="en-US" sz="2400" b="1" smtClean="0">
+              <a:rPr lang="en-US" sz="2400" b="1">
                 <a:solidFill>
                   <a:srgbClr val="0070C0"/>
                 </a:solidFill>
@@ -3303,13 +3261,13 @@
               <a:t>public int </a:t>
             </a:r>
             <a:r>
-              <a:rPr lang="en-US" sz="2400" b="1" smtClean="0">
+              <a:rPr lang="en-US" sz="2400" b="1">
                 <a:latin typeface="Consolas" panose="020B0609020204030204" pitchFamily="49" charset="0"/>
               </a:rPr>
               <a:t>Factorial(</a:t>
             </a:r>
             <a:r>
-              <a:rPr lang="en-US" sz="2400" b="1" smtClean="0">
+              <a:rPr lang="en-US" sz="2400" b="1">
                 <a:solidFill>
                   <a:srgbClr val="FF0000"/>
                 </a:solidFill>
@@ -3318,7 +3276,7 @@
               <a:t>4</a:t>
             </a:r>
             <a:r>
-              <a:rPr lang="en-US" sz="2400" b="1" smtClean="0">
+              <a:rPr lang="en-US" sz="2400" b="1">
                 <a:latin typeface="Consolas" panose="020B0609020204030204" pitchFamily="49" charset="0"/>
               </a:rPr>
               <a:t>)</a:t>
@@ -3335,7 +3293,7 @@
               <a:buNone/>
             </a:pPr>
             <a:r>
-              <a:rPr lang="en-US" sz="2400" b="1" smtClean="0">
+              <a:rPr lang="en-US" sz="2400" b="1">
                 <a:latin typeface="Consolas" panose="020B0609020204030204" pitchFamily="49" charset="0"/>
               </a:rPr>
               <a:t>{</a:t>
@@ -3352,16 +3310,10 @@
               <a:rPr lang="en-US" sz="2400" b="1">
                 <a:latin typeface="Consolas" panose="020B0609020204030204" pitchFamily="49" charset="0"/>
               </a:rPr>
-              <a:t> </a:t>
-            </a:r>
-            <a:r>
-              <a:rPr lang="en-US" sz="2400" b="1" smtClean="0">
-                <a:latin typeface="Consolas" panose="020B0609020204030204" pitchFamily="49" charset="0"/>
-              </a:rPr>
-              <a:t>   </a:t>
-            </a:r>
-            <a:r>
-              <a:rPr lang="en-US" sz="2400" b="1" smtClean="0">
+              <a:t>    </a:t>
+            </a:r>
+            <a:r>
+              <a:rPr lang="en-US" sz="2400" b="1">
                 <a:solidFill>
                   <a:srgbClr val="0070C0"/>
                 </a:solidFill>
@@ -3370,7 +3322,7 @@
               <a:t>return</a:t>
             </a:r>
             <a:r>
-              <a:rPr lang="en-US" sz="2400" b="1" smtClean="0">
+              <a:rPr lang="en-US" sz="2400" b="1">
                 <a:latin typeface="Consolas" panose="020B0609020204030204" pitchFamily="49" charset="0"/>
               </a:rPr>
               <a:t> (</a:t>
@@ -3385,7 +3337,7 @@
               <a:t>4</a:t>
             </a:r>
             <a:r>
-              <a:rPr lang="en-US" sz="2400" b="1" smtClean="0">
+              <a:rPr lang="en-US" sz="2400" b="1">
                 <a:latin typeface="Consolas" panose="020B0609020204030204" pitchFamily="49" charset="0"/>
               </a:rPr>
               <a:t> &lt;= 1) ? 1 : (</a:t>
@@ -3400,13 +3352,13 @@
               <a:t>4</a:t>
             </a:r>
             <a:r>
-              <a:rPr lang="en-US" sz="2400" b="1" smtClean="0">
+              <a:rPr lang="en-US" sz="2400" b="1">
                 <a:latin typeface="Consolas" panose="020B0609020204030204" pitchFamily="49" charset="0"/>
               </a:rPr>
               <a:t> * Factorial(</a:t>
             </a:r>
             <a:r>
-              <a:rPr lang="en-US" sz="2400" b="1" smtClean="0">
+              <a:rPr lang="en-US" sz="2400" b="1">
                 <a:solidFill>
                   <a:srgbClr val="FF0000"/>
                 </a:solidFill>
@@ -3415,7 +3367,7 @@
               <a:t>4</a:t>
             </a:r>
             <a:r>
-              <a:rPr lang="en-US" sz="2400" b="1" smtClean="0">
+              <a:rPr lang="en-US" sz="2400" b="1">
                 <a:latin typeface="Consolas" panose="020B0609020204030204" pitchFamily="49" charset="0"/>
               </a:rPr>
               <a:t> – 1));</a:t>
@@ -3429,7 +3381,7 @@
               <a:buNone/>
             </a:pPr>
             <a:r>
-              <a:rPr lang="en-US" sz="2400" b="1" smtClean="0">
+              <a:rPr lang="en-US" sz="2400" b="1">
                 <a:latin typeface="Consolas" panose="020B0609020204030204" pitchFamily="49" charset="0"/>
               </a:rPr>
               <a:t>}</a:t>
@@ -3453,7 +3405,7 @@
             <a:pPr marL="0" indent="0">
               <a:buNone/>
             </a:pPr>
-            <a:endParaRPr lang="da-DK" sz="2000" b="1" smtClean="0">
+            <a:endParaRPr lang="da-DK" sz="2000" b="1">
               <a:solidFill>
                 <a:srgbClr val="0070C0"/>
               </a:solidFill>
@@ -3484,13 +3436,6 @@
       </p:transition>
     </mc:Fallback>
   </mc:AlternateContent>
-  <p:timing>
-    <p:tnLst>
-      <p:par>
-        <p:cTn id="1" dur="indefinite" restart="never" nodeType="tmRoot"/>
-      </p:par>
-    </p:tnLst>
-  </p:timing>
 </p:sld>
 </file>
 
@@ -3540,7 +3485,7 @@
               <a:buNone/>
             </a:pPr>
             <a:r>
-              <a:rPr lang="en-US" sz="2400" b="1" smtClean="0">
+              <a:rPr lang="en-US" sz="2400" b="1">
                 <a:solidFill>
                   <a:srgbClr val="0070C0"/>
                 </a:solidFill>
@@ -3549,13 +3494,13 @@
               <a:t>public int </a:t>
             </a:r>
             <a:r>
-              <a:rPr lang="en-US" sz="2400" b="1" smtClean="0">
+              <a:rPr lang="en-US" sz="2400" b="1">
                 <a:latin typeface="Consolas" panose="020B0609020204030204" pitchFamily="49" charset="0"/>
               </a:rPr>
               <a:t>Factorial(</a:t>
             </a:r>
             <a:r>
-              <a:rPr lang="en-US" sz="2400" b="1" smtClean="0">
+              <a:rPr lang="en-US" sz="2400" b="1">
                 <a:solidFill>
                   <a:srgbClr val="FF0000"/>
                 </a:solidFill>
@@ -3564,7 +3509,7 @@
               <a:t>4</a:t>
             </a:r>
             <a:r>
-              <a:rPr lang="en-US" sz="2400" b="1" smtClean="0">
+              <a:rPr lang="en-US" sz="2400" b="1">
                 <a:latin typeface="Consolas" panose="020B0609020204030204" pitchFamily="49" charset="0"/>
               </a:rPr>
               <a:t>)</a:t>
@@ -3581,7 +3526,7 @@
               <a:buNone/>
             </a:pPr>
             <a:r>
-              <a:rPr lang="en-US" sz="2400" b="1" smtClean="0">
+              <a:rPr lang="en-US" sz="2400" b="1">
                 <a:latin typeface="Consolas" panose="020B0609020204030204" pitchFamily="49" charset="0"/>
               </a:rPr>
               <a:t>{</a:t>
@@ -3598,16 +3543,10 @@
               <a:rPr lang="en-US" sz="2400" b="1">
                 <a:latin typeface="Consolas" panose="020B0609020204030204" pitchFamily="49" charset="0"/>
               </a:rPr>
-              <a:t> </a:t>
-            </a:r>
-            <a:r>
-              <a:rPr lang="en-US" sz="2400" b="1" smtClean="0">
-                <a:latin typeface="Consolas" panose="020B0609020204030204" pitchFamily="49" charset="0"/>
-              </a:rPr>
-              <a:t>   </a:t>
-            </a:r>
-            <a:r>
-              <a:rPr lang="en-US" sz="2400" b="1" smtClean="0">
+              <a:t>    </a:t>
+            </a:r>
+            <a:r>
+              <a:rPr lang="en-US" sz="2400" b="1">
                 <a:solidFill>
                   <a:srgbClr val="0070C0"/>
                 </a:solidFill>
@@ -3616,7 +3555,7 @@
               <a:t>return</a:t>
             </a:r>
             <a:r>
-              <a:rPr lang="en-US" sz="2400" b="1" smtClean="0">
+              <a:rPr lang="en-US" sz="2400" b="1">
                 <a:latin typeface="Consolas" panose="020B0609020204030204" pitchFamily="49" charset="0"/>
               </a:rPr>
               <a:t> (</a:t>
@@ -3631,7 +3570,7 @@
               <a:t>4</a:t>
             </a:r>
             <a:r>
-              <a:rPr lang="en-US" sz="2400" b="1" smtClean="0">
+              <a:rPr lang="en-US" sz="2400" b="1">
                 <a:latin typeface="Consolas" panose="020B0609020204030204" pitchFamily="49" charset="0"/>
               </a:rPr>
               <a:t> &lt;= 1) ? 1 : (</a:t>
@@ -3646,13 +3585,13 @@
               <a:t>4</a:t>
             </a:r>
             <a:r>
-              <a:rPr lang="en-US" sz="2400" b="1" smtClean="0">
+              <a:rPr lang="en-US" sz="2400" b="1">
                 <a:latin typeface="Consolas" panose="020B0609020204030204" pitchFamily="49" charset="0"/>
               </a:rPr>
               <a:t> * Factorial(</a:t>
             </a:r>
             <a:r>
-              <a:rPr lang="en-US" sz="2400" b="1" smtClean="0">
+              <a:rPr lang="en-US" sz="2400" b="1">
                 <a:solidFill>
                   <a:srgbClr val="00B0F0"/>
                 </a:solidFill>
@@ -3661,7 +3600,7 @@
               <a:t>3</a:t>
             </a:r>
             <a:r>
-              <a:rPr lang="en-US" sz="2400" b="1" smtClean="0">
+              <a:rPr lang="en-US" sz="2400" b="1">
                 <a:latin typeface="Consolas" panose="020B0609020204030204" pitchFamily="49" charset="0"/>
               </a:rPr>
               <a:t>));</a:t>
@@ -3675,7 +3614,7 @@
               <a:buNone/>
             </a:pPr>
             <a:r>
-              <a:rPr lang="en-US" sz="2400" b="1" smtClean="0">
+              <a:rPr lang="en-US" sz="2400" b="1">
                 <a:latin typeface="Consolas" panose="020B0609020204030204" pitchFamily="49" charset="0"/>
               </a:rPr>
               <a:t>}</a:t>
@@ -3699,7 +3638,7 @@
             <a:pPr marL="0" indent="0">
               <a:buNone/>
             </a:pPr>
-            <a:endParaRPr lang="da-DK" sz="2000" b="1" smtClean="0">
+            <a:endParaRPr lang="da-DK" sz="2000" b="1">
               <a:solidFill>
                 <a:srgbClr val="0070C0"/>
               </a:solidFill>
@@ -3730,13 +3669,6 @@
       </p:transition>
     </mc:Fallback>
   </mc:AlternateContent>
-  <p:timing>
-    <p:tnLst>
-      <p:par>
-        <p:cTn id="1" dur="indefinite" restart="never" nodeType="tmRoot"/>
-      </p:par>
-    </p:tnLst>
-  </p:timing>
 </p:sld>
 </file>
 
@@ -3786,7 +3718,7 @@
               <a:buNone/>
             </a:pPr>
             <a:r>
-              <a:rPr lang="en-US" sz="1800" b="1" smtClean="0">
+              <a:rPr lang="en-US" sz="1800" b="1">
                 <a:solidFill>
                   <a:srgbClr val="0070C0"/>
                 </a:solidFill>
@@ -3795,13 +3727,13 @@
               <a:t>public int </a:t>
             </a:r>
             <a:r>
-              <a:rPr lang="en-US" sz="1800" b="1" smtClean="0">
+              <a:rPr lang="en-US" sz="1800" b="1">
                 <a:latin typeface="Consolas" panose="020B0609020204030204" pitchFamily="49" charset="0"/>
               </a:rPr>
               <a:t>Factorial(</a:t>
             </a:r>
             <a:r>
-              <a:rPr lang="en-US" sz="1800" b="1" smtClean="0">
+              <a:rPr lang="en-US" sz="1800" b="1">
                 <a:solidFill>
                   <a:srgbClr val="FF0000"/>
                 </a:solidFill>
@@ -3810,7 +3742,7 @@
               <a:t>4</a:t>
             </a:r>
             <a:r>
-              <a:rPr lang="en-US" sz="1800" b="1" smtClean="0">
+              <a:rPr lang="en-US" sz="1800" b="1">
                 <a:latin typeface="Consolas" panose="020B0609020204030204" pitchFamily="49" charset="0"/>
               </a:rPr>
               <a:t>)</a:t>
@@ -3827,7 +3759,7 @@
               <a:buNone/>
             </a:pPr>
             <a:r>
-              <a:rPr lang="en-US" sz="1800" b="1" smtClean="0">
+              <a:rPr lang="en-US" sz="1800" b="1">
                 <a:latin typeface="Consolas" panose="020B0609020204030204" pitchFamily="49" charset="0"/>
               </a:rPr>
               <a:t>{</a:t>
@@ -3844,16 +3776,10 @@
               <a:rPr lang="en-US" sz="1800" b="1">
                 <a:latin typeface="Consolas" panose="020B0609020204030204" pitchFamily="49" charset="0"/>
               </a:rPr>
-              <a:t> </a:t>
-            </a:r>
-            <a:r>
-              <a:rPr lang="en-US" sz="1800" b="1" smtClean="0">
-                <a:latin typeface="Consolas" panose="020B0609020204030204" pitchFamily="49" charset="0"/>
-              </a:rPr>
-              <a:t>   </a:t>
-            </a:r>
-            <a:r>
-              <a:rPr lang="en-US" sz="1800" b="1" smtClean="0">
+              <a:t>    </a:t>
+            </a:r>
+            <a:r>
+              <a:rPr lang="en-US" sz="1800" b="1">
                 <a:solidFill>
                   <a:srgbClr val="0070C0"/>
                 </a:solidFill>
@@ -3862,7 +3788,7 @@
               <a:t>return</a:t>
             </a:r>
             <a:r>
-              <a:rPr lang="en-US" sz="1800" b="1" smtClean="0">
+              <a:rPr lang="en-US" sz="1800" b="1">
                 <a:latin typeface="Consolas" panose="020B0609020204030204" pitchFamily="49" charset="0"/>
               </a:rPr>
               <a:t> (</a:t>
@@ -3877,7 +3803,7 @@
               <a:t>4</a:t>
             </a:r>
             <a:r>
-              <a:rPr lang="en-US" sz="1800" b="1" smtClean="0">
+              <a:rPr lang="en-US" sz="1800" b="1">
                 <a:latin typeface="Consolas" panose="020B0609020204030204" pitchFamily="49" charset="0"/>
               </a:rPr>
               <a:t> &lt;= 1) ? 1 : (</a:t>
@@ -3892,13 +3818,13 @@
               <a:t>4</a:t>
             </a:r>
             <a:r>
-              <a:rPr lang="en-US" sz="1800" b="1" smtClean="0">
+              <a:rPr lang="en-US" sz="1800" b="1">
                 <a:latin typeface="Consolas" panose="020B0609020204030204" pitchFamily="49" charset="0"/>
               </a:rPr>
               <a:t> * (</a:t>
             </a:r>
             <a:r>
-              <a:rPr lang="en-US" sz="1800" b="1" smtClean="0">
+              <a:rPr lang="en-US" sz="1800" b="1">
                 <a:solidFill>
                   <a:srgbClr val="0070C0"/>
                 </a:solidFill>
@@ -3907,13 +3833,13 @@
               <a:t>return</a:t>
             </a:r>
             <a:r>
-              <a:rPr lang="en-US" sz="1800" b="1" smtClean="0">
+              <a:rPr lang="en-US" sz="1800" b="1">
                 <a:latin typeface="Consolas" panose="020B0609020204030204" pitchFamily="49" charset="0"/>
               </a:rPr>
               <a:t> (</a:t>
             </a:r>
             <a:r>
-              <a:rPr lang="en-US" sz="1800" b="1" smtClean="0">
+              <a:rPr lang="en-US" sz="1800" b="1">
                 <a:solidFill>
                   <a:srgbClr val="00B0F0"/>
                 </a:solidFill>
@@ -3922,25 +3848,13 @@
               <a:t>3</a:t>
             </a:r>
             <a:r>
-              <a:rPr lang="en-US" sz="1800" b="1" smtClean="0">
-                <a:latin typeface="Consolas" panose="020B0609020204030204" pitchFamily="49" charset="0"/>
-              </a:rPr>
-              <a:t> </a:t>
-            </a:r>
-            <a:r>
-              <a:rPr lang="en-US" sz="1800" b="1">
-                <a:latin typeface="Consolas" panose="020B0609020204030204" pitchFamily="49" charset="0"/>
-              </a:rPr>
-              <a:t>&lt;= 1) ? 1 : </a:t>
-            </a:r>
-            <a:r>
-              <a:rPr lang="en-US" sz="1800" b="1" smtClean="0">
-                <a:latin typeface="Consolas" panose="020B0609020204030204" pitchFamily="49" charset="0"/>
-              </a:rPr>
-              <a:t>(</a:t>
-            </a:r>
-            <a:r>
-              <a:rPr lang="en-US" sz="1800" b="1" smtClean="0">
+              <a:rPr lang="en-US" sz="1800" b="1">
+                <a:latin typeface="Consolas" panose="020B0609020204030204" pitchFamily="49" charset="0"/>
+              </a:rPr>
+              <a:t> &lt;= 1) ? 1 : (</a:t>
+            </a:r>
+            <a:r>
+              <a:rPr lang="en-US" sz="1800" b="1">
                 <a:solidFill>
                   <a:srgbClr val="00B0F0"/>
                 </a:solidFill>
@@ -3949,25 +3863,13 @@
               <a:t>3</a:t>
             </a:r>
             <a:r>
-              <a:rPr lang="en-US" sz="1800" b="1" smtClean="0">
-                <a:latin typeface="Consolas" panose="020B0609020204030204" pitchFamily="49" charset="0"/>
-              </a:rPr>
-              <a:t> </a:t>
-            </a:r>
-            <a:r>
-              <a:rPr lang="en-US" sz="1800" b="1">
-                <a:latin typeface="Consolas" panose="020B0609020204030204" pitchFamily="49" charset="0"/>
-              </a:rPr>
-              <a:t>* </a:t>
-            </a:r>
-            <a:r>
-              <a:rPr lang="en-US" sz="1800" b="1" smtClean="0">
-                <a:latin typeface="Consolas" panose="020B0609020204030204" pitchFamily="49" charset="0"/>
-              </a:rPr>
-              <a:t>Factorial(</a:t>
-            </a:r>
-            <a:r>
-              <a:rPr lang="en-US" sz="1800" b="1" smtClean="0">
+              <a:rPr lang="en-US" sz="1800" b="1">
+                <a:latin typeface="Consolas" panose="020B0609020204030204" pitchFamily="49" charset="0"/>
+              </a:rPr>
+              <a:t> * Factorial(</a:t>
+            </a:r>
+            <a:r>
+              <a:rPr lang="en-US" sz="1800" b="1">
                 <a:solidFill>
                   <a:srgbClr val="00B0F0"/>
                 </a:solidFill>
@@ -3976,33 +3878,21 @@
               <a:t>3</a:t>
             </a:r>
             <a:r>
-              <a:rPr lang="en-US" sz="1800" b="1" smtClean="0">
-                <a:latin typeface="Consolas" panose="020B0609020204030204" pitchFamily="49" charset="0"/>
-              </a:rPr>
-              <a:t> </a:t>
-            </a:r>
-            <a:r>
-              <a:rPr lang="en-US" sz="1800" b="1">
-                <a:latin typeface="Consolas" panose="020B0609020204030204" pitchFamily="49" charset="0"/>
-              </a:rPr>
-              <a:t>– 1</a:t>
-            </a:r>
-            <a:r>
-              <a:rPr lang="en-US" sz="1800" b="1" smtClean="0">
-                <a:latin typeface="Consolas" panose="020B0609020204030204" pitchFamily="49" charset="0"/>
-              </a:rPr>
-              <a:t>))));</a:t>
-            </a:r>
-          </a:p>
-          <a:p>
-            <a:pPr marL="0" indent="0">
-              <a:spcBef>
-                <a:spcPts val="0"/>
-              </a:spcBef>
-              <a:buNone/>
-            </a:pPr>
-            <a:r>
-              <a:rPr lang="en-US" sz="1800" b="1" smtClean="0">
+              <a:rPr lang="en-US" sz="1800" b="1">
+                <a:latin typeface="Consolas" panose="020B0609020204030204" pitchFamily="49" charset="0"/>
+              </a:rPr>
+              <a:t> – 1))));</a:t>
+            </a:r>
+          </a:p>
+          <a:p>
+            <a:pPr marL="0" indent="0">
+              <a:spcBef>
+                <a:spcPts val="0"/>
+              </a:spcBef>
+              <a:buNone/>
+            </a:pPr>
+            <a:r>
+              <a:rPr lang="en-US" sz="1800" b="1">
                 <a:latin typeface="Consolas" panose="020B0609020204030204" pitchFamily="49" charset="0"/>
               </a:rPr>
               <a:t>}</a:t>
@@ -4026,7 +3916,7 @@
             <a:pPr marL="0" indent="0">
               <a:buNone/>
             </a:pPr>
-            <a:endParaRPr lang="da-DK" sz="2000" b="1" smtClean="0">
+            <a:endParaRPr lang="da-DK" sz="2000" b="1">
               <a:solidFill>
                 <a:srgbClr val="0070C0"/>
               </a:solidFill>
@@ -4057,13 +3947,6 @@
       </p:transition>
     </mc:Fallback>
   </mc:AlternateContent>
-  <p:timing>
-    <p:tnLst>
-      <p:par>
-        <p:cTn id="1" dur="indefinite" restart="never" nodeType="tmRoot"/>
-      </p:par>
-    </p:tnLst>
-  </p:timing>
 </p:sld>
 </file>
 
@@ -4113,7 +3996,7 @@
               <a:buNone/>
             </a:pPr>
             <a:r>
-              <a:rPr lang="en-US" sz="1800" b="1" smtClean="0">
+              <a:rPr lang="en-US" sz="1800" b="1">
                 <a:solidFill>
                   <a:srgbClr val="0070C0"/>
                 </a:solidFill>
@@ -4122,13 +4005,13 @@
               <a:t>public int </a:t>
             </a:r>
             <a:r>
-              <a:rPr lang="en-US" sz="1800" b="1" smtClean="0">
+              <a:rPr lang="en-US" sz="1800" b="1">
                 <a:latin typeface="Consolas" panose="020B0609020204030204" pitchFamily="49" charset="0"/>
               </a:rPr>
               <a:t>Factorial(</a:t>
             </a:r>
             <a:r>
-              <a:rPr lang="en-US" sz="1800" b="1" smtClean="0">
+              <a:rPr lang="en-US" sz="1800" b="1">
                 <a:solidFill>
                   <a:srgbClr val="FF0000"/>
                 </a:solidFill>
@@ -4137,7 +4020,7 @@
               <a:t>4</a:t>
             </a:r>
             <a:r>
-              <a:rPr lang="en-US" sz="1800" b="1" smtClean="0">
+              <a:rPr lang="en-US" sz="1800" b="1">
                 <a:latin typeface="Consolas" panose="020B0609020204030204" pitchFamily="49" charset="0"/>
               </a:rPr>
               <a:t>)</a:t>
@@ -4154,7 +4037,7 @@
               <a:buNone/>
             </a:pPr>
             <a:r>
-              <a:rPr lang="en-US" sz="1800" b="1" smtClean="0">
+              <a:rPr lang="en-US" sz="1800" b="1">
                 <a:latin typeface="Consolas" panose="020B0609020204030204" pitchFamily="49" charset="0"/>
               </a:rPr>
               <a:t>{</a:t>
@@ -4171,16 +4054,10 @@
               <a:rPr lang="en-US" sz="1800" b="1">
                 <a:latin typeface="Consolas" panose="020B0609020204030204" pitchFamily="49" charset="0"/>
               </a:rPr>
-              <a:t> </a:t>
-            </a:r>
-            <a:r>
-              <a:rPr lang="en-US" sz="1800" b="1" smtClean="0">
-                <a:latin typeface="Consolas" panose="020B0609020204030204" pitchFamily="49" charset="0"/>
-              </a:rPr>
-              <a:t>   </a:t>
-            </a:r>
-            <a:r>
-              <a:rPr lang="en-US" sz="1800" b="1" smtClean="0">
+              <a:t>    </a:t>
+            </a:r>
+            <a:r>
+              <a:rPr lang="en-US" sz="1800" b="1">
                 <a:solidFill>
                   <a:srgbClr val="0070C0"/>
                 </a:solidFill>
@@ -4189,7 +4066,7 @@
               <a:t>return</a:t>
             </a:r>
             <a:r>
-              <a:rPr lang="en-US" sz="1800" b="1" smtClean="0">
+              <a:rPr lang="en-US" sz="1800" b="1">
                 <a:latin typeface="Consolas" panose="020B0609020204030204" pitchFamily="49" charset="0"/>
               </a:rPr>
               <a:t> (</a:t>
@@ -4204,7 +4081,7 @@
               <a:t>4</a:t>
             </a:r>
             <a:r>
-              <a:rPr lang="en-US" sz="1800" b="1" smtClean="0">
+              <a:rPr lang="en-US" sz="1800" b="1">
                 <a:latin typeface="Consolas" panose="020B0609020204030204" pitchFamily="49" charset="0"/>
               </a:rPr>
               <a:t> &lt;= 1) ? 1 : (</a:t>
@@ -4219,13 +4096,13 @@
               <a:t>4</a:t>
             </a:r>
             <a:r>
-              <a:rPr lang="en-US" sz="1800" b="1" smtClean="0">
+              <a:rPr lang="en-US" sz="1800" b="1">
                 <a:latin typeface="Consolas" panose="020B0609020204030204" pitchFamily="49" charset="0"/>
               </a:rPr>
               <a:t> * (</a:t>
             </a:r>
             <a:r>
-              <a:rPr lang="en-US" sz="1800" b="1" smtClean="0">
+              <a:rPr lang="en-US" sz="1800" b="1">
                 <a:solidFill>
                   <a:srgbClr val="0070C0"/>
                 </a:solidFill>
@@ -4234,13 +4111,13 @@
               <a:t>return</a:t>
             </a:r>
             <a:r>
-              <a:rPr lang="en-US" sz="1800" b="1" smtClean="0">
+              <a:rPr lang="en-US" sz="1800" b="1">
                 <a:latin typeface="Consolas" panose="020B0609020204030204" pitchFamily="49" charset="0"/>
               </a:rPr>
               <a:t> (</a:t>
             </a:r>
             <a:r>
-              <a:rPr lang="en-US" sz="1800" b="1" smtClean="0">
+              <a:rPr lang="en-US" sz="1800" b="1">
                 <a:solidFill>
                   <a:srgbClr val="00B0F0"/>
                 </a:solidFill>
@@ -4249,25 +4126,13 @@
               <a:t>3</a:t>
             </a:r>
             <a:r>
-              <a:rPr lang="en-US" sz="1800" b="1" smtClean="0">
-                <a:latin typeface="Consolas" panose="020B0609020204030204" pitchFamily="49" charset="0"/>
-              </a:rPr>
-              <a:t> </a:t>
-            </a:r>
-            <a:r>
-              <a:rPr lang="en-US" sz="1800" b="1">
-                <a:latin typeface="Consolas" panose="020B0609020204030204" pitchFamily="49" charset="0"/>
-              </a:rPr>
-              <a:t>&lt;= 1) ? 1 : </a:t>
-            </a:r>
-            <a:r>
-              <a:rPr lang="en-US" sz="1800" b="1" smtClean="0">
-                <a:latin typeface="Consolas" panose="020B0609020204030204" pitchFamily="49" charset="0"/>
-              </a:rPr>
-              <a:t>(</a:t>
-            </a:r>
-            <a:r>
-              <a:rPr lang="en-US" sz="1800" b="1" smtClean="0">
+              <a:rPr lang="en-US" sz="1800" b="1">
+                <a:latin typeface="Consolas" panose="020B0609020204030204" pitchFamily="49" charset="0"/>
+              </a:rPr>
+              <a:t> &lt;= 1) ? 1 : (</a:t>
+            </a:r>
+            <a:r>
+              <a:rPr lang="en-US" sz="1800" b="1">
                 <a:solidFill>
                   <a:srgbClr val="00B0F0"/>
                 </a:solidFill>
@@ -4276,22 +4141,10 @@
               <a:t>3</a:t>
             </a:r>
             <a:r>
-              <a:rPr lang="en-US" sz="1800" b="1" smtClean="0">
-                <a:latin typeface="Consolas" panose="020B0609020204030204" pitchFamily="49" charset="0"/>
-              </a:rPr>
-              <a:t> </a:t>
-            </a:r>
-            <a:r>
-              <a:rPr lang="en-US" sz="1800" b="1">
-                <a:latin typeface="Consolas" panose="020B0609020204030204" pitchFamily="49" charset="0"/>
-              </a:rPr>
-              <a:t>* </a:t>
-            </a:r>
-            <a:r>
-              <a:rPr lang="en-US" sz="1800" b="1" smtClean="0">
-                <a:latin typeface="Consolas" panose="020B0609020204030204" pitchFamily="49" charset="0"/>
-              </a:rPr>
-              <a:t>Factorial(</a:t>
+              <a:rPr lang="en-US" sz="1800" b="1">
+                <a:latin typeface="Consolas" panose="020B0609020204030204" pitchFamily="49" charset="0"/>
+              </a:rPr>
+              <a:t> * Factorial(</a:t>
             </a:r>
             <a:r>
               <a:rPr lang="en-US" sz="1800" b="1">
@@ -4303,7 +4156,7 @@
               <a:t>2</a:t>
             </a:r>
             <a:r>
-              <a:rPr lang="en-US" sz="1800" b="1" smtClean="0">
+              <a:rPr lang="en-US" sz="1800" b="1">
                 <a:latin typeface="Consolas" panose="020B0609020204030204" pitchFamily="49" charset="0"/>
               </a:rPr>
               <a:t>))));</a:t>
@@ -4317,7 +4170,7 @@
               <a:buNone/>
             </a:pPr>
             <a:r>
-              <a:rPr lang="en-US" sz="1800" b="1" smtClean="0">
+              <a:rPr lang="en-US" sz="1800" b="1">
                 <a:latin typeface="Consolas" panose="020B0609020204030204" pitchFamily="49" charset="0"/>
               </a:rPr>
               <a:t>}</a:t>
@@ -4341,7 +4194,7 @@
             <a:pPr marL="0" indent="0">
               <a:buNone/>
             </a:pPr>
-            <a:endParaRPr lang="da-DK" sz="2000" b="1" smtClean="0">
+            <a:endParaRPr lang="da-DK" sz="2000" b="1">
               <a:solidFill>
                 <a:srgbClr val="0070C0"/>
               </a:solidFill>
@@ -4372,13 +4225,6 @@
       </p:transition>
     </mc:Fallback>
   </mc:AlternateContent>
-  <p:timing>
-    <p:tnLst>
-      <p:par>
-        <p:cTn id="1" dur="indefinite" restart="never" nodeType="tmRoot"/>
-      </p:par>
-    </p:tnLst>
-  </p:timing>
 </p:sld>
 </file>
 
@@ -4428,7 +4274,7 @@
               <a:buNone/>
             </a:pPr>
             <a:r>
-              <a:rPr lang="en-US" sz="1400" b="1" smtClean="0">
+              <a:rPr lang="en-US" sz="1400" b="1">
                 <a:solidFill>
                   <a:srgbClr val="0070C0"/>
                 </a:solidFill>
@@ -4437,13 +4283,13 @@
               <a:t>public int </a:t>
             </a:r>
             <a:r>
-              <a:rPr lang="en-US" sz="1400" b="1" smtClean="0">
+              <a:rPr lang="en-US" sz="1400" b="1">
                 <a:latin typeface="Consolas" panose="020B0609020204030204" pitchFamily="49" charset="0"/>
               </a:rPr>
               <a:t>Factorial(</a:t>
             </a:r>
             <a:r>
-              <a:rPr lang="en-US" sz="1400" b="1" smtClean="0">
+              <a:rPr lang="en-US" sz="1400" b="1">
                 <a:solidFill>
                   <a:srgbClr val="FF0000"/>
                 </a:solidFill>
@@ -4452,7 +4298,7 @@
               <a:t>4</a:t>
             </a:r>
             <a:r>
-              <a:rPr lang="en-US" sz="1400" b="1" smtClean="0">
+              <a:rPr lang="en-US" sz="1400" b="1">
                 <a:latin typeface="Consolas" panose="020B0609020204030204" pitchFamily="49" charset="0"/>
               </a:rPr>
               <a:t>)</a:t>
@@ -4469,7 +4315,7 @@
               <a:buNone/>
             </a:pPr>
             <a:r>
-              <a:rPr lang="en-US" sz="1400" b="1" smtClean="0">
+              <a:rPr lang="en-US" sz="1400" b="1">
                 <a:latin typeface="Consolas" panose="020B0609020204030204" pitchFamily="49" charset="0"/>
               </a:rPr>
               <a:t>{</a:t>
@@ -4486,16 +4332,10 @@
               <a:rPr lang="en-US" sz="1400" b="1">
                 <a:latin typeface="Consolas" panose="020B0609020204030204" pitchFamily="49" charset="0"/>
               </a:rPr>
-              <a:t> </a:t>
-            </a:r>
-            <a:r>
-              <a:rPr lang="en-US" sz="1400" b="1" smtClean="0">
-                <a:latin typeface="Consolas" panose="020B0609020204030204" pitchFamily="49" charset="0"/>
-              </a:rPr>
-              <a:t>   </a:t>
-            </a:r>
-            <a:r>
-              <a:rPr lang="en-US" sz="1400" b="1" smtClean="0">
+              <a:t>    </a:t>
+            </a:r>
+            <a:r>
+              <a:rPr lang="en-US" sz="1400" b="1">
                 <a:solidFill>
                   <a:srgbClr val="0070C0"/>
                 </a:solidFill>
@@ -4504,7 +4344,7 @@
               <a:t>return</a:t>
             </a:r>
             <a:r>
-              <a:rPr lang="en-US" sz="1400" b="1" smtClean="0">
+              <a:rPr lang="en-US" sz="1400" b="1">
                 <a:latin typeface="Consolas" panose="020B0609020204030204" pitchFamily="49" charset="0"/>
               </a:rPr>
               <a:t> (</a:t>
@@ -4519,7 +4359,7 @@
               <a:t>4</a:t>
             </a:r>
             <a:r>
-              <a:rPr lang="en-US" sz="1400" b="1" smtClean="0">
+              <a:rPr lang="en-US" sz="1400" b="1">
                 <a:latin typeface="Consolas" panose="020B0609020204030204" pitchFamily="49" charset="0"/>
               </a:rPr>
               <a:t> &lt;= 1) ? 1 : (</a:t>
@@ -4534,13 +4374,13 @@
               <a:t>4</a:t>
             </a:r>
             <a:r>
-              <a:rPr lang="en-US" sz="1400" b="1" smtClean="0">
+              <a:rPr lang="en-US" sz="1400" b="1">
                 <a:latin typeface="Consolas" panose="020B0609020204030204" pitchFamily="49" charset="0"/>
               </a:rPr>
               <a:t> * (</a:t>
             </a:r>
             <a:r>
-              <a:rPr lang="en-US" sz="1400" b="1" smtClean="0">
+              <a:rPr lang="en-US" sz="1400" b="1">
                 <a:solidFill>
                   <a:srgbClr val="0070C0"/>
                 </a:solidFill>
@@ -4549,13 +4389,13 @@
               <a:t>return</a:t>
             </a:r>
             <a:r>
-              <a:rPr lang="en-US" sz="1400" b="1" smtClean="0">
+              <a:rPr lang="en-US" sz="1400" b="1">
                 <a:latin typeface="Consolas" panose="020B0609020204030204" pitchFamily="49" charset="0"/>
               </a:rPr>
               <a:t> (</a:t>
             </a:r>
             <a:r>
-              <a:rPr lang="en-US" sz="1400" b="1" smtClean="0">
+              <a:rPr lang="en-US" sz="1400" b="1">
                 <a:solidFill>
                   <a:srgbClr val="00B0F0"/>
                 </a:solidFill>
@@ -4564,25 +4404,13 @@
               <a:t>3</a:t>
             </a:r>
             <a:r>
-              <a:rPr lang="en-US" sz="1400" b="1" smtClean="0">
-                <a:latin typeface="Consolas" panose="020B0609020204030204" pitchFamily="49" charset="0"/>
-              </a:rPr>
-              <a:t> </a:t>
-            </a:r>
-            <a:r>
               <a:rPr lang="en-US" sz="1400" b="1">
                 <a:latin typeface="Consolas" panose="020B0609020204030204" pitchFamily="49" charset="0"/>
               </a:rPr>
-              <a:t>&lt;= 1) ? 1 : </a:t>
-            </a:r>
-            <a:r>
-              <a:rPr lang="en-US" sz="1400" b="1" smtClean="0">
-                <a:latin typeface="Consolas" panose="020B0609020204030204" pitchFamily="49" charset="0"/>
-              </a:rPr>
-              <a:t>(</a:t>
-            </a:r>
-            <a:r>
-              <a:rPr lang="en-US" sz="1400" b="1" smtClean="0">
+              <a:t> &lt;= 1) ? 1 : (</a:t>
+            </a:r>
+            <a:r>
+              <a:rPr lang="en-US" sz="1400" b="1">
                 <a:solidFill>
                   <a:srgbClr val="00B0F0"/>
                 </a:solidFill>
@@ -4591,16 +4419,10 @@
               <a:t>3</a:t>
             </a:r>
             <a:r>
-              <a:rPr lang="en-US" sz="1400" b="1" smtClean="0">
-                <a:latin typeface="Consolas" panose="020B0609020204030204" pitchFamily="49" charset="0"/>
-              </a:rPr>
-              <a:t> </a:t>
-            </a:r>
-            <a:r>
               <a:rPr lang="en-US" sz="1400" b="1">
                 <a:latin typeface="Consolas" panose="020B0609020204030204" pitchFamily="49" charset="0"/>
               </a:rPr>
-              <a:t>* </a:t>
+              <a:t> * </a:t>
             </a:r>
             <a:r>
               <a:rPr lang="en-US" sz="1400" b="1">
@@ -4615,13 +4437,7 @@
               <a:rPr lang="en-US" sz="1400" b="1">
                 <a:latin typeface="Consolas" panose="020B0609020204030204" pitchFamily="49" charset="0"/>
               </a:rPr>
-              <a:t> </a:t>
-            </a:r>
-            <a:r>
-              <a:rPr lang="en-US" sz="1400" b="1" smtClean="0">
-                <a:latin typeface="Consolas" panose="020B0609020204030204" pitchFamily="49" charset="0"/>
-              </a:rPr>
-              <a:t>(</a:t>
+              <a:t> (</a:t>
             </a:r>
             <a:r>
               <a:rPr lang="en-US" sz="1400" b="1">
@@ -4633,22 +4449,10 @@
               <a:t>2</a:t>
             </a:r>
             <a:r>
-              <a:rPr lang="en-US" sz="1400" b="1" smtClean="0">
-                <a:latin typeface="Consolas" panose="020B0609020204030204" pitchFamily="49" charset="0"/>
-              </a:rPr>
-              <a:t> </a:t>
-            </a:r>
-            <a:r>
               <a:rPr lang="en-US" sz="1400" b="1">
                 <a:latin typeface="Consolas" panose="020B0609020204030204" pitchFamily="49" charset="0"/>
               </a:rPr>
-              <a:t>&lt;= 1) ? 1 : </a:t>
-            </a:r>
-            <a:r>
-              <a:rPr lang="en-US" sz="1400" b="1" smtClean="0">
-                <a:latin typeface="Consolas" panose="020B0609020204030204" pitchFamily="49" charset="0"/>
-              </a:rPr>
-              <a:t>(</a:t>
+              <a:t> &lt;= 1) ? 1 : (</a:t>
             </a:r>
             <a:r>
               <a:rPr lang="en-US" sz="1400" b="1">
@@ -4660,25 +4464,13 @@
               <a:t>2</a:t>
             </a:r>
             <a:r>
-              <a:rPr lang="en-US" sz="1400" b="1" smtClean="0">
-                <a:latin typeface="Consolas" panose="020B0609020204030204" pitchFamily="49" charset="0"/>
-              </a:rPr>
-              <a:t> </a:t>
-            </a:r>
-            <a:r>
               <a:rPr lang="en-US" sz="1400" b="1">
                 <a:latin typeface="Consolas" panose="020B0609020204030204" pitchFamily="49" charset="0"/>
               </a:rPr>
-              <a:t>* </a:t>
-            </a:r>
-            <a:r>
-              <a:rPr lang="en-US" sz="1400" b="1" smtClean="0">
-                <a:latin typeface="Consolas" panose="020B0609020204030204" pitchFamily="49" charset="0"/>
-              </a:rPr>
-              <a:t>Factorial(</a:t>
-            </a:r>
-            <a:r>
-              <a:rPr lang="en-US" sz="1400" b="1" smtClean="0">
+              <a:t> * Factorial(</a:t>
+            </a:r>
+            <a:r>
+              <a:rPr lang="en-US" sz="1400" b="1">
                 <a:solidFill>
                   <a:schemeClr val="bg1">
                     <a:lumMod val="50000"/>
@@ -4689,7 +4481,7 @@
               <a:t>1</a:t>
             </a:r>
             <a:r>
-              <a:rPr lang="en-US" sz="1400" b="1" smtClean="0">
+              <a:rPr lang="en-US" sz="1400" b="1">
                 <a:latin typeface="Consolas" panose="020B0609020204030204" pitchFamily="49" charset="0"/>
               </a:rPr>
               <a:t>)))));</a:t>
@@ -4703,7 +4495,7 @@
               <a:buNone/>
             </a:pPr>
             <a:r>
-              <a:rPr lang="en-US" sz="1400" b="1" smtClean="0">
+              <a:rPr lang="en-US" sz="1400" b="1">
                 <a:latin typeface="Consolas" panose="020B0609020204030204" pitchFamily="49" charset="0"/>
               </a:rPr>
               <a:t>}</a:t>
@@ -4727,7 +4519,7 @@
             <a:pPr marL="0" indent="0">
               <a:buNone/>
             </a:pPr>
-            <a:endParaRPr lang="da-DK" sz="2000" b="1" smtClean="0">
+            <a:endParaRPr lang="da-DK" sz="2000" b="1">
               <a:solidFill>
                 <a:srgbClr val="0070C0"/>
               </a:solidFill>
@@ -4758,13 +4550,6 @@
       </p:transition>
     </mc:Fallback>
   </mc:AlternateContent>
-  <p:timing>
-    <p:tnLst>
-      <p:par>
-        <p:cTn id="1" dur="indefinite" restart="never" nodeType="tmRoot"/>
-      </p:par>
-    </p:tnLst>
-  </p:timing>
 </p:sld>
 </file>
 
@@ -4814,7 +4599,7 @@
               <a:buNone/>
             </a:pPr>
             <a:r>
-              <a:rPr lang="en-US" sz="1400" b="1" smtClean="0">
+              <a:rPr lang="en-US" sz="1400" b="1">
                 <a:solidFill>
                   <a:srgbClr val="0070C0"/>
                 </a:solidFill>
@@ -4823,13 +4608,13 @@
               <a:t>public int </a:t>
             </a:r>
             <a:r>
-              <a:rPr lang="en-US" sz="1400" b="1" smtClean="0">
+              <a:rPr lang="en-US" sz="1400" b="1">
                 <a:latin typeface="Consolas" panose="020B0609020204030204" pitchFamily="49" charset="0"/>
               </a:rPr>
               <a:t>Factorial(</a:t>
             </a:r>
             <a:r>
-              <a:rPr lang="en-US" sz="1400" b="1" smtClean="0">
+              <a:rPr lang="en-US" sz="1400" b="1">
                 <a:solidFill>
                   <a:srgbClr val="FF0000"/>
                 </a:solidFill>
@@ -4838,7 +4623,7 @@
               <a:t>4</a:t>
             </a:r>
             <a:r>
-              <a:rPr lang="en-US" sz="1400" b="1" smtClean="0">
+              <a:rPr lang="en-US" sz="1400" b="1">
                 <a:latin typeface="Consolas" panose="020B0609020204030204" pitchFamily="49" charset="0"/>
               </a:rPr>
               <a:t>)</a:t>
@@ -4855,7 +4640,7 @@
               <a:buNone/>
             </a:pPr>
             <a:r>
-              <a:rPr lang="en-US" sz="1400" b="1" smtClean="0">
+              <a:rPr lang="en-US" sz="1400" b="1">
                 <a:latin typeface="Consolas" panose="020B0609020204030204" pitchFamily="49" charset="0"/>
               </a:rPr>
               <a:t>{</a:t>
@@ -4872,16 +4657,10 @@
               <a:rPr lang="en-US" sz="1400" b="1">
                 <a:latin typeface="Consolas" panose="020B0609020204030204" pitchFamily="49" charset="0"/>
               </a:rPr>
-              <a:t> </a:t>
-            </a:r>
-            <a:r>
-              <a:rPr lang="en-US" sz="1400" b="1" smtClean="0">
-                <a:latin typeface="Consolas" panose="020B0609020204030204" pitchFamily="49" charset="0"/>
-              </a:rPr>
-              <a:t>   </a:t>
-            </a:r>
-            <a:r>
-              <a:rPr lang="en-US" sz="1400" b="1" smtClean="0">
+              <a:t>    </a:t>
+            </a:r>
+            <a:r>
+              <a:rPr lang="en-US" sz="1400" b="1">
                 <a:solidFill>
                   <a:srgbClr val="0070C0"/>
                 </a:solidFill>
@@ -4890,7 +4669,7 @@
               <a:t>return</a:t>
             </a:r>
             <a:r>
-              <a:rPr lang="en-US" sz="1400" b="1" smtClean="0">
+              <a:rPr lang="en-US" sz="1400" b="1">
                 <a:latin typeface="Consolas" panose="020B0609020204030204" pitchFamily="49" charset="0"/>
               </a:rPr>
               <a:t> (</a:t>
@@ -4905,7 +4684,7 @@
               <a:t>4</a:t>
             </a:r>
             <a:r>
-              <a:rPr lang="en-US" sz="1400" b="1" smtClean="0">
+              <a:rPr lang="en-US" sz="1400" b="1">
                 <a:latin typeface="Consolas" panose="020B0609020204030204" pitchFamily="49" charset="0"/>
               </a:rPr>
               <a:t> &lt;= 1) ? 1 : (</a:t>
@@ -4920,13 +4699,13 @@
               <a:t>4</a:t>
             </a:r>
             <a:r>
-              <a:rPr lang="en-US" sz="1400" b="1" smtClean="0">
+              <a:rPr lang="en-US" sz="1400" b="1">
                 <a:latin typeface="Consolas" panose="020B0609020204030204" pitchFamily="49" charset="0"/>
               </a:rPr>
               <a:t> * (</a:t>
             </a:r>
             <a:r>
-              <a:rPr lang="en-US" sz="1400" b="1" smtClean="0">
+              <a:rPr lang="en-US" sz="1400" b="1">
                 <a:solidFill>
                   <a:srgbClr val="0070C0"/>
                 </a:solidFill>
@@ -4935,13 +4714,13 @@
               <a:t>return</a:t>
             </a:r>
             <a:r>
-              <a:rPr lang="en-US" sz="1400" b="1" smtClean="0">
+              <a:rPr lang="en-US" sz="1400" b="1">
                 <a:latin typeface="Consolas" panose="020B0609020204030204" pitchFamily="49" charset="0"/>
               </a:rPr>
               <a:t> (</a:t>
             </a:r>
             <a:r>
-              <a:rPr lang="en-US" sz="1400" b="1" smtClean="0">
+              <a:rPr lang="en-US" sz="1400" b="1">
                 <a:solidFill>
                   <a:srgbClr val="00B0F0"/>
                 </a:solidFill>
@@ -4950,25 +4729,13 @@
               <a:t>3</a:t>
             </a:r>
             <a:r>
-              <a:rPr lang="en-US" sz="1400" b="1" smtClean="0">
-                <a:latin typeface="Consolas" panose="020B0609020204030204" pitchFamily="49" charset="0"/>
-              </a:rPr>
-              <a:t> </a:t>
-            </a:r>
-            <a:r>
               <a:rPr lang="en-US" sz="1400" b="1">
                 <a:latin typeface="Consolas" panose="020B0609020204030204" pitchFamily="49" charset="0"/>
               </a:rPr>
-              <a:t>&lt;= 1) ? 1 : </a:t>
-            </a:r>
-            <a:r>
-              <a:rPr lang="en-US" sz="1400" b="1" smtClean="0">
-                <a:latin typeface="Consolas" panose="020B0609020204030204" pitchFamily="49" charset="0"/>
-              </a:rPr>
-              <a:t>(</a:t>
-            </a:r>
-            <a:r>
-              <a:rPr lang="en-US" sz="1400" b="1" smtClean="0">
+              <a:t> &lt;= 1) ? 1 : (</a:t>
+            </a:r>
+            <a:r>
+              <a:rPr lang="en-US" sz="1400" b="1">
                 <a:solidFill>
                   <a:srgbClr val="00B0F0"/>
                 </a:solidFill>
@@ -4977,16 +4744,10 @@
               <a:t>3</a:t>
             </a:r>
             <a:r>
-              <a:rPr lang="en-US" sz="1400" b="1" smtClean="0">
-                <a:latin typeface="Consolas" panose="020B0609020204030204" pitchFamily="49" charset="0"/>
-              </a:rPr>
-              <a:t> </a:t>
-            </a:r>
-            <a:r>
               <a:rPr lang="en-US" sz="1400" b="1">
                 <a:latin typeface="Consolas" panose="020B0609020204030204" pitchFamily="49" charset="0"/>
               </a:rPr>
-              <a:t>* </a:t>
+              <a:t> * </a:t>
             </a:r>
             <a:r>
               <a:rPr lang="en-US" sz="1400" b="1">
@@ -5001,13 +4762,7 @@
               <a:rPr lang="en-US" sz="1400" b="1">
                 <a:latin typeface="Consolas" panose="020B0609020204030204" pitchFamily="49" charset="0"/>
               </a:rPr>
-              <a:t> </a:t>
-            </a:r>
-            <a:r>
-              <a:rPr lang="en-US" sz="1400" b="1" smtClean="0">
-                <a:latin typeface="Consolas" panose="020B0609020204030204" pitchFamily="49" charset="0"/>
-              </a:rPr>
-              <a:t>(</a:t>
+              <a:t> (</a:t>
             </a:r>
             <a:r>
               <a:rPr lang="en-US" sz="1400" b="1">
@@ -5019,22 +4774,10 @@
               <a:t>2</a:t>
             </a:r>
             <a:r>
-              <a:rPr lang="en-US" sz="1400" b="1" smtClean="0">
-                <a:latin typeface="Consolas" panose="020B0609020204030204" pitchFamily="49" charset="0"/>
-              </a:rPr>
-              <a:t> </a:t>
-            </a:r>
-            <a:r>
               <a:rPr lang="en-US" sz="1400" b="1">
                 <a:latin typeface="Consolas" panose="020B0609020204030204" pitchFamily="49" charset="0"/>
               </a:rPr>
-              <a:t>&lt;= 1) ? 1 : </a:t>
-            </a:r>
-            <a:r>
-              <a:rPr lang="en-US" sz="1400" b="1" smtClean="0">
-                <a:latin typeface="Consolas" panose="020B0609020204030204" pitchFamily="49" charset="0"/>
-              </a:rPr>
-              <a:t>(</a:t>
+              <a:t> &lt;= 1) ? 1 : (</a:t>
             </a:r>
             <a:r>
               <a:rPr lang="en-US" sz="1400" b="1">
@@ -5046,33 +4789,21 @@
               <a:t>2</a:t>
             </a:r>
             <a:r>
-              <a:rPr lang="en-US" sz="1400" b="1" smtClean="0">
-                <a:latin typeface="Consolas" panose="020B0609020204030204" pitchFamily="49" charset="0"/>
-              </a:rPr>
-              <a:t> </a:t>
-            </a:r>
-            <a:r>
               <a:rPr lang="en-US" sz="1400" b="1">
                 <a:latin typeface="Consolas" panose="020B0609020204030204" pitchFamily="49" charset="0"/>
               </a:rPr>
-              <a:t>* 1</a:t>
-            </a:r>
-            <a:r>
-              <a:rPr lang="en-US" sz="1400" b="1" smtClean="0">
-                <a:latin typeface="Consolas" panose="020B0609020204030204" pitchFamily="49" charset="0"/>
-              </a:rPr>
-              <a:t>))));</a:t>
-            </a:r>
-          </a:p>
-          <a:p>
-            <a:pPr marL="0" indent="0">
-              <a:spcBef>
-                <a:spcPts val="0"/>
-              </a:spcBef>
-              <a:buNone/>
-            </a:pPr>
-            <a:r>
-              <a:rPr lang="en-US" sz="1400" b="1" smtClean="0">
+              <a:t> * 1))));</a:t>
+            </a:r>
+          </a:p>
+          <a:p>
+            <a:pPr marL="0" indent="0">
+              <a:spcBef>
+                <a:spcPts val="0"/>
+              </a:spcBef>
+              <a:buNone/>
+            </a:pPr>
+            <a:r>
+              <a:rPr lang="en-US" sz="1400" b="1">
                 <a:latin typeface="Consolas" panose="020B0609020204030204" pitchFamily="49" charset="0"/>
               </a:rPr>
               <a:t>}</a:t>
@@ -5096,7 +4827,7 @@
             <a:pPr marL="0" indent="0">
               <a:buNone/>
             </a:pPr>
-            <a:endParaRPr lang="da-DK" sz="2000" b="1" smtClean="0">
+            <a:endParaRPr lang="da-DK" sz="2000" b="1">
               <a:solidFill>
                 <a:srgbClr val="0070C0"/>
               </a:solidFill>
@@ -5127,13 +4858,6 @@
       </p:transition>
     </mc:Fallback>
   </mc:AlternateContent>
-  <p:timing>
-    <p:tnLst>
-      <p:par>
-        <p:cTn id="1" dur="indefinite" restart="never" nodeType="tmRoot"/>
-      </p:par>
-    </p:tnLst>
-  </p:timing>
 </p:sld>
 </file>
 
@@ -5183,7 +4907,7 @@
               <a:buNone/>
             </a:pPr>
             <a:r>
-              <a:rPr lang="en-US" sz="1800" b="1" smtClean="0">
+              <a:rPr lang="en-US" sz="1800" b="1">
                 <a:solidFill>
                   <a:srgbClr val="0070C0"/>
                 </a:solidFill>
@@ -5192,13 +4916,13 @@
               <a:t>public int </a:t>
             </a:r>
             <a:r>
-              <a:rPr lang="en-US" sz="1800" b="1" smtClean="0">
+              <a:rPr lang="en-US" sz="1800" b="1">
                 <a:latin typeface="Consolas" panose="020B0609020204030204" pitchFamily="49" charset="0"/>
               </a:rPr>
               <a:t>Factorial(</a:t>
             </a:r>
             <a:r>
-              <a:rPr lang="en-US" sz="1800" b="1" smtClean="0">
+              <a:rPr lang="en-US" sz="1800" b="1">
                 <a:solidFill>
                   <a:srgbClr val="FF0000"/>
                 </a:solidFill>
@@ -5207,7 +4931,7 @@
               <a:t>4</a:t>
             </a:r>
             <a:r>
-              <a:rPr lang="en-US" sz="1800" b="1" smtClean="0">
+              <a:rPr lang="en-US" sz="1800" b="1">
                 <a:latin typeface="Consolas" panose="020B0609020204030204" pitchFamily="49" charset="0"/>
               </a:rPr>
               <a:t>)</a:t>
@@ -5224,7 +4948,7 @@
               <a:buNone/>
             </a:pPr>
             <a:r>
-              <a:rPr lang="en-US" sz="1800" b="1" smtClean="0">
+              <a:rPr lang="en-US" sz="1800" b="1">
                 <a:latin typeface="Consolas" panose="020B0609020204030204" pitchFamily="49" charset="0"/>
               </a:rPr>
               <a:t>{</a:t>
@@ -5241,16 +4965,10 @@
               <a:rPr lang="en-US" sz="1800" b="1">
                 <a:latin typeface="Consolas" panose="020B0609020204030204" pitchFamily="49" charset="0"/>
               </a:rPr>
-              <a:t> </a:t>
-            </a:r>
-            <a:r>
-              <a:rPr lang="en-US" sz="1800" b="1" smtClean="0">
-                <a:latin typeface="Consolas" panose="020B0609020204030204" pitchFamily="49" charset="0"/>
-              </a:rPr>
-              <a:t>   </a:t>
-            </a:r>
-            <a:r>
-              <a:rPr lang="en-US" sz="1800" b="1" smtClean="0">
+              <a:t>    </a:t>
+            </a:r>
+            <a:r>
+              <a:rPr lang="en-US" sz="1800" b="1">
                 <a:solidFill>
                   <a:srgbClr val="0070C0"/>
                 </a:solidFill>
@@ -5259,7 +4977,7 @@
               <a:t>return</a:t>
             </a:r>
             <a:r>
-              <a:rPr lang="en-US" sz="1800" b="1" smtClean="0">
+              <a:rPr lang="en-US" sz="1800" b="1">
                 <a:latin typeface="Consolas" panose="020B0609020204030204" pitchFamily="49" charset="0"/>
               </a:rPr>
               <a:t> (</a:t>
@@ -5274,7 +4992,7 @@
               <a:t>4</a:t>
             </a:r>
             <a:r>
-              <a:rPr lang="en-US" sz="1800" b="1" smtClean="0">
+              <a:rPr lang="en-US" sz="1800" b="1">
                 <a:latin typeface="Consolas" panose="020B0609020204030204" pitchFamily="49" charset="0"/>
               </a:rPr>
               <a:t> &lt;= 1) ? 1 : (</a:t>
@@ -5289,13 +5007,13 @@
               <a:t>4</a:t>
             </a:r>
             <a:r>
-              <a:rPr lang="en-US" sz="1800" b="1" smtClean="0">
+              <a:rPr lang="en-US" sz="1800" b="1">
                 <a:latin typeface="Consolas" panose="020B0609020204030204" pitchFamily="49" charset="0"/>
               </a:rPr>
               <a:t> * (</a:t>
             </a:r>
             <a:r>
-              <a:rPr lang="en-US" sz="1800" b="1" smtClean="0">
+              <a:rPr lang="en-US" sz="1800" b="1">
                 <a:solidFill>
                   <a:srgbClr val="0070C0"/>
                 </a:solidFill>
@@ -5304,13 +5022,13 @@
               <a:t>return</a:t>
             </a:r>
             <a:r>
-              <a:rPr lang="en-US" sz="1800" b="1" smtClean="0">
+              <a:rPr lang="en-US" sz="1800" b="1">
                 <a:latin typeface="Consolas" panose="020B0609020204030204" pitchFamily="49" charset="0"/>
               </a:rPr>
               <a:t> (</a:t>
             </a:r>
             <a:r>
-              <a:rPr lang="en-US" sz="1800" b="1" smtClean="0">
+              <a:rPr lang="en-US" sz="1800" b="1">
                 <a:solidFill>
                   <a:srgbClr val="00B0F0"/>
                 </a:solidFill>
@@ -5319,25 +5037,13 @@
               <a:t>3</a:t>
             </a:r>
             <a:r>
-              <a:rPr lang="en-US" sz="1800" b="1" smtClean="0">
-                <a:latin typeface="Consolas" panose="020B0609020204030204" pitchFamily="49" charset="0"/>
-              </a:rPr>
-              <a:t> </a:t>
-            </a:r>
-            <a:r>
-              <a:rPr lang="en-US" sz="1800" b="1">
-                <a:latin typeface="Consolas" panose="020B0609020204030204" pitchFamily="49" charset="0"/>
-              </a:rPr>
-              <a:t>&lt;= 1) ? 1 : </a:t>
-            </a:r>
-            <a:r>
-              <a:rPr lang="en-US" sz="1800" b="1" smtClean="0">
-                <a:latin typeface="Consolas" panose="020B0609020204030204" pitchFamily="49" charset="0"/>
-              </a:rPr>
-              <a:t>(</a:t>
-            </a:r>
-            <a:r>
-              <a:rPr lang="en-US" sz="1800" b="1" smtClean="0">
+              <a:rPr lang="en-US" sz="1800" b="1">
+                <a:latin typeface="Consolas" panose="020B0609020204030204" pitchFamily="49" charset="0"/>
+              </a:rPr>
+              <a:t> &lt;= 1) ? 1 : (</a:t>
+            </a:r>
+            <a:r>
+              <a:rPr lang="en-US" sz="1800" b="1">
                 <a:solidFill>
                   <a:srgbClr val="00B0F0"/>
                 </a:solidFill>
@@ -5346,16 +5052,10 @@
               <a:t>3</a:t>
             </a:r>
             <a:r>
-              <a:rPr lang="en-US" sz="1800" b="1" smtClean="0">
-                <a:latin typeface="Consolas" panose="020B0609020204030204" pitchFamily="49" charset="0"/>
-              </a:rPr>
-              <a:t> </a:t>
-            </a:r>
-            <a:r>
-              <a:rPr lang="en-US" sz="1800" b="1">
-                <a:latin typeface="Consolas" panose="020B0609020204030204" pitchFamily="49" charset="0"/>
-              </a:rPr>
-              <a:t>* </a:t>
+              <a:rPr lang="en-US" sz="1800" b="1">
+                <a:latin typeface="Consolas" panose="020B0609020204030204" pitchFamily="49" charset="0"/>
+              </a:rPr>
+              <a:t> * </a:t>
             </a:r>
             <a:r>
               <a:rPr lang="en-US" sz="1800" b="1">
@@ -5370,13 +5070,7 @@
               <a:rPr lang="en-US" sz="1800" b="1">
                 <a:latin typeface="Consolas" panose="020B0609020204030204" pitchFamily="49" charset="0"/>
               </a:rPr>
-              <a:t> </a:t>
-            </a:r>
-            <a:r>
-              <a:rPr lang="en-US" sz="1800" b="1" smtClean="0">
-                <a:latin typeface="Consolas" panose="020B0609020204030204" pitchFamily="49" charset="0"/>
-              </a:rPr>
-              <a:t>(</a:t>
+              <a:t> (</a:t>
             </a:r>
             <a:r>
               <a:rPr lang="en-US" sz="1800" b="1">
@@ -5388,33 +5082,21 @@
               <a:t>2</a:t>
             </a:r>
             <a:r>
-              <a:rPr lang="en-US" sz="1800" b="1" smtClean="0">
-                <a:latin typeface="Consolas" panose="020B0609020204030204" pitchFamily="49" charset="0"/>
-              </a:rPr>
-              <a:t> </a:t>
-            </a:r>
-            <a:r>
-              <a:rPr lang="en-US" sz="1800" b="1">
-                <a:latin typeface="Consolas" panose="020B0609020204030204" pitchFamily="49" charset="0"/>
-              </a:rPr>
-              <a:t>&lt;= 1) ? 1 : </a:t>
-            </a:r>
-            <a:r>
-              <a:rPr lang="en-US" sz="1800" b="1" smtClean="0">
-                <a:latin typeface="Consolas" panose="020B0609020204030204" pitchFamily="49" charset="0"/>
-              </a:rPr>
-              <a:t>2)));</a:t>
-            </a:r>
-          </a:p>
-          <a:p>
-            <a:pPr marL="0" indent="0">
-              <a:spcBef>
-                <a:spcPts val="0"/>
-              </a:spcBef>
-              <a:buNone/>
-            </a:pPr>
-            <a:r>
-              <a:rPr lang="en-US" sz="1800" b="1" smtClean="0">
+              <a:rPr lang="en-US" sz="1800" b="1">
+                <a:latin typeface="Consolas" panose="020B0609020204030204" pitchFamily="49" charset="0"/>
+              </a:rPr>
+              <a:t> &lt;= 1) ? 1 : 2)));</a:t>
+            </a:r>
+          </a:p>
+          <a:p>
+            <a:pPr marL="0" indent="0">
+              <a:spcBef>
+                <a:spcPts val="0"/>
+              </a:spcBef>
+              <a:buNone/>
+            </a:pPr>
+            <a:r>
+              <a:rPr lang="en-US" sz="1800" b="1">
                 <a:latin typeface="Consolas" panose="020B0609020204030204" pitchFamily="49" charset="0"/>
               </a:rPr>
               <a:t>}</a:t>
@@ -5438,7 +5120,7 @@
             <a:pPr marL="0" indent="0">
               <a:buNone/>
             </a:pPr>
-            <a:endParaRPr lang="da-DK" sz="2000" b="1" smtClean="0">
+            <a:endParaRPr lang="da-DK" sz="2000" b="1">
               <a:solidFill>
                 <a:srgbClr val="0070C0"/>
               </a:solidFill>
@@ -5469,13 +5151,6 @@
       </p:transition>
     </mc:Fallback>
   </mc:AlternateContent>
-  <p:timing>
-    <p:tnLst>
-      <p:par>
-        <p:cTn id="1" dur="indefinite" restart="never" nodeType="tmRoot"/>
-      </p:par>
-    </p:tnLst>
-  </p:timing>
 </p:sld>
 </file>
 
@@ -5525,7 +5200,7 @@
               <a:buNone/>
             </a:pPr>
             <a:r>
-              <a:rPr lang="en-US" sz="1800" b="1" smtClean="0">
+              <a:rPr lang="en-US" sz="1800" b="1">
                 <a:solidFill>
                   <a:srgbClr val="0070C0"/>
                 </a:solidFill>
@@ -5534,13 +5209,13 @@
               <a:t>public int </a:t>
             </a:r>
             <a:r>
-              <a:rPr lang="en-US" sz="1800" b="1" smtClean="0">
+              <a:rPr lang="en-US" sz="1800" b="1">
                 <a:latin typeface="Consolas" panose="020B0609020204030204" pitchFamily="49" charset="0"/>
               </a:rPr>
               <a:t>Factorial(</a:t>
             </a:r>
             <a:r>
-              <a:rPr lang="en-US" sz="1800" b="1" smtClean="0">
+              <a:rPr lang="en-US" sz="1800" b="1">
                 <a:solidFill>
                   <a:srgbClr val="FF0000"/>
                 </a:solidFill>
@@ -5549,7 +5224,7 @@
               <a:t>4</a:t>
             </a:r>
             <a:r>
-              <a:rPr lang="en-US" sz="1800" b="1" smtClean="0">
+              <a:rPr lang="en-US" sz="1800" b="1">
                 <a:latin typeface="Consolas" panose="020B0609020204030204" pitchFamily="49" charset="0"/>
               </a:rPr>
               <a:t>)</a:t>
@@ -5566,7 +5241,7 @@
               <a:buNone/>
             </a:pPr>
             <a:r>
-              <a:rPr lang="en-US" sz="1800" b="1" smtClean="0">
+              <a:rPr lang="en-US" sz="1800" b="1">
                 <a:latin typeface="Consolas" panose="020B0609020204030204" pitchFamily="49" charset="0"/>
               </a:rPr>
               <a:t>{</a:t>
@@ -5583,16 +5258,10 @@
               <a:rPr lang="en-US" sz="1800" b="1">
                 <a:latin typeface="Consolas" panose="020B0609020204030204" pitchFamily="49" charset="0"/>
               </a:rPr>
-              <a:t> </a:t>
-            </a:r>
-            <a:r>
-              <a:rPr lang="en-US" sz="1800" b="1" smtClean="0">
-                <a:latin typeface="Consolas" panose="020B0609020204030204" pitchFamily="49" charset="0"/>
-              </a:rPr>
-              <a:t>   </a:t>
-            </a:r>
-            <a:r>
-              <a:rPr lang="en-US" sz="1800" b="1" smtClean="0">
+              <a:t>    </a:t>
+            </a:r>
+            <a:r>
+              <a:rPr lang="en-US" sz="1800" b="1">
                 <a:solidFill>
                   <a:srgbClr val="0070C0"/>
                 </a:solidFill>
@@ -5601,7 +5270,7 @@
               <a:t>return</a:t>
             </a:r>
             <a:r>
-              <a:rPr lang="en-US" sz="1800" b="1" smtClean="0">
+              <a:rPr lang="en-US" sz="1800" b="1">
                 <a:latin typeface="Consolas" panose="020B0609020204030204" pitchFamily="49" charset="0"/>
               </a:rPr>
               <a:t> (</a:t>
@@ -5616,7 +5285,7 @@
               <a:t>4</a:t>
             </a:r>
             <a:r>
-              <a:rPr lang="en-US" sz="1800" b="1" smtClean="0">
+              <a:rPr lang="en-US" sz="1800" b="1">
                 <a:latin typeface="Consolas" panose="020B0609020204030204" pitchFamily="49" charset="0"/>
               </a:rPr>
               <a:t> &lt;= 1) ? 1 : (</a:t>
@@ -5631,13 +5300,13 @@
               <a:t>4</a:t>
             </a:r>
             <a:r>
-              <a:rPr lang="en-US" sz="1800" b="1" smtClean="0">
+              <a:rPr lang="en-US" sz="1800" b="1">
                 <a:latin typeface="Consolas" panose="020B0609020204030204" pitchFamily="49" charset="0"/>
               </a:rPr>
               <a:t> * (</a:t>
             </a:r>
             <a:r>
-              <a:rPr lang="en-US" sz="1800" b="1" smtClean="0">
+              <a:rPr lang="en-US" sz="1800" b="1">
                 <a:solidFill>
                   <a:srgbClr val="0070C0"/>
                 </a:solidFill>
@@ -5646,13 +5315,13 @@
               <a:t>return</a:t>
             </a:r>
             <a:r>
-              <a:rPr lang="en-US" sz="1800" b="1" smtClean="0">
+              <a:rPr lang="en-US" sz="1800" b="1">
                 <a:latin typeface="Consolas" panose="020B0609020204030204" pitchFamily="49" charset="0"/>
               </a:rPr>
               <a:t> (</a:t>
             </a:r>
             <a:r>
-              <a:rPr lang="en-US" sz="1800" b="1" smtClean="0">
+              <a:rPr lang="en-US" sz="1800" b="1">
                 <a:solidFill>
                   <a:srgbClr val="00B0F0"/>
                 </a:solidFill>
@@ -5661,25 +5330,13 @@
               <a:t>3</a:t>
             </a:r>
             <a:r>
-              <a:rPr lang="en-US" sz="1800" b="1" smtClean="0">
-                <a:latin typeface="Consolas" panose="020B0609020204030204" pitchFamily="49" charset="0"/>
-              </a:rPr>
-              <a:t> </a:t>
-            </a:r>
-            <a:r>
-              <a:rPr lang="en-US" sz="1800" b="1">
-                <a:latin typeface="Consolas" panose="020B0609020204030204" pitchFamily="49" charset="0"/>
-              </a:rPr>
-              <a:t>&lt;= 1) ? 1 : </a:t>
-            </a:r>
-            <a:r>
-              <a:rPr lang="en-US" sz="1800" b="1" smtClean="0">
-                <a:latin typeface="Consolas" panose="020B0609020204030204" pitchFamily="49" charset="0"/>
-              </a:rPr>
-              <a:t>(</a:t>
-            </a:r>
-            <a:r>
-              <a:rPr lang="en-US" sz="1800" b="1" smtClean="0">
+              <a:rPr lang="en-US" sz="1800" b="1">
+                <a:latin typeface="Consolas" panose="020B0609020204030204" pitchFamily="49" charset="0"/>
+              </a:rPr>
+              <a:t> &lt;= 1) ? 1 : (</a:t>
+            </a:r>
+            <a:r>
+              <a:rPr lang="en-US" sz="1800" b="1">
                 <a:solidFill>
                   <a:srgbClr val="00B0F0"/>
                 </a:solidFill>
@@ -5688,33 +5345,21 @@
               <a:t>3</a:t>
             </a:r>
             <a:r>
-              <a:rPr lang="en-US" sz="1800" b="1" smtClean="0">
-                <a:latin typeface="Consolas" panose="020B0609020204030204" pitchFamily="49" charset="0"/>
-              </a:rPr>
-              <a:t> </a:t>
-            </a:r>
-            <a:r>
-              <a:rPr lang="en-US" sz="1800" b="1">
-                <a:latin typeface="Consolas" panose="020B0609020204030204" pitchFamily="49" charset="0"/>
-              </a:rPr>
-              <a:t>* </a:t>
-            </a:r>
-            <a:r>
-              <a:rPr lang="en-US" sz="1800" b="1" smtClean="0">
-                <a:latin typeface="Consolas" panose="020B0609020204030204" pitchFamily="49" charset="0"/>
-              </a:rPr>
-              <a:t>2)));</a:t>
-            </a:r>
-          </a:p>
-          <a:p>
-            <a:pPr marL="0" indent="0">
-              <a:spcBef>
-                <a:spcPts val="0"/>
-              </a:spcBef>
-              <a:buNone/>
-            </a:pPr>
-            <a:r>
-              <a:rPr lang="en-US" sz="1800" b="1" smtClean="0">
+              <a:rPr lang="en-US" sz="1800" b="1">
+                <a:latin typeface="Consolas" panose="020B0609020204030204" pitchFamily="49" charset="0"/>
+              </a:rPr>
+              <a:t> * 2)));</a:t>
+            </a:r>
+          </a:p>
+          <a:p>
+            <a:pPr marL="0" indent="0">
+              <a:spcBef>
+                <a:spcPts val="0"/>
+              </a:spcBef>
+              <a:buNone/>
+            </a:pPr>
+            <a:r>
+              <a:rPr lang="en-US" sz="1800" b="1">
                 <a:latin typeface="Consolas" panose="020B0609020204030204" pitchFamily="49" charset="0"/>
               </a:rPr>
               <a:t>}</a:t>
@@ -5738,7 +5383,7 @@
             <a:pPr marL="0" indent="0">
               <a:buNone/>
             </a:pPr>
-            <a:endParaRPr lang="da-DK" sz="2000" b="1" smtClean="0">
+            <a:endParaRPr lang="da-DK" sz="2000" b="1">
               <a:solidFill>
                 <a:srgbClr val="0070C0"/>
               </a:solidFill>
@@ -5769,13 +5414,6 @@
       </p:transition>
     </mc:Fallback>
   </mc:AlternateContent>
-  <p:timing>
-    <p:tnLst>
-      <p:par>
-        <p:cTn id="1" dur="indefinite" restart="never" nodeType="tmRoot"/>
-      </p:par>
-    </p:tnLst>
-  </p:timing>
 </p:sld>
 </file>
 
@@ -5825,7 +5463,7 @@
               <a:buNone/>
             </a:pPr>
             <a:r>
-              <a:rPr lang="en-US" sz="2400" b="1" smtClean="0">
+              <a:rPr lang="en-US" sz="2400" b="1">
                 <a:solidFill>
                   <a:srgbClr val="0070C0"/>
                 </a:solidFill>
@@ -5834,13 +5472,13 @@
               <a:t>public int </a:t>
             </a:r>
             <a:r>
-              <a:rPr lang="en-US" sz="2400" b="1" smtClean="0">
+              <a:rPr lang="en-US" sz="2400" b="1">
                 <a:latin typeface="Consolas" panose="020B0609020204030204" pitchFamily="49" charset="0"/>
               </a:rPr>
               <a:t>Factorial(</a:t>
             </a:r>
             <a:r>
-              <a:rPr lang="en-US" sz="2400" b="1" smtClean="0">
+              <a:rPr lang="en-US" sz="2400" b="1">
                 <a:solidFill>
                   <a:srgbClr val="FF0000"/>
                 </a:solidFill>
@@ -5849,7 +5487,7 @@
               <a:t>4</a:t>
             </a:r>
             <a:r>
-              <a:rPr lang="en-US" sz="2400" b="1" smtClean="0">
+              <a:rPr lang="en-US" sz="2400" b="1">
                 <a:latin typeface="Consolas" panose="020B0609020204030204" pitchFamily="49" charset="0"/>
               </a:rPr>
               <a:t>)</a:t>
@@ -5866,7 +5504,7 @@
               <a:buNone/>
             </a:pPr>
             <a:r>
-              <a:rPr lang="en-US" sz="2400" b="1" smtClean="0">
+              <a:rPr lang="en-US" sz="2400" b="1">
                 <a:latin typeface="Consolas" panose="020B0609020204030204" pitchFamily="49" charset="0"/>
               </a:rPr>
               <a:t>{</a:t>
@@ -5883,16 +5521,10 @@
               <a:rPr lang="en-US" sz="2400" b="1">
                 <a:latin typeface="Consolas" panose="020B0609020204030204" pitchFamily="49" charset="0"/>
               </a:rPr>
-              <a:t> </a:t>
-            </a:r>
-            <a:r>
-              <a:rPr lang="en-US" sz="2400" b="1" smtClean="0">
-                <a:latin typeface="Consolas" panose="020B0609020204030204" pitchFamily="49" charset="0"/>
-              </a:rPr>
-              <a:t>   </a:t>
-            </a:r>
-            <a:r>
-              <a:rPr lang="en-US" sz="2400" b="1" smtClean="0">
+              <a:t>    </a:t>
+            </a:r>
+            <a:r>
+              <a:rPr lang="en-US" sz="2400" b="1">
                 <a:solidFill>
                   <a:srgbClr val="0070C0"/>
                 </a:solidFill>
@@ -5901,7 +5533,7 @@
               <a:t>return</a:t>
             </a:r>
             <a:r>
-              <a:rPr lang="en-US" sz="2400" b="1" smtClean="0">
+              <a:rPr lang="en-US" sz="2400" b="1">
                 <a:latin typeface="Consolas" panose="020B0609020204030204" pitchFamily="49" charset="0"/>
               </a:rPr>
               <a:t> (</a:t>
@@ -5916,7 +5548,7 @@
               <a:t>4</a:t>
             </a:r>
             <a:r>
-              <a:rPr lang="en-US" sz="2400" b="1" smtClean="0">
+              <a:rPr lang="en-US" sz="2400" b="1">
                 <a:latin typeface="Consolas" panose="020B0609020204030204" pitchFamily="49" charset="0"/>
               </a:rPr>
               <a:t> &lt;= 1) ? 1 : (</a:t>
@@ -5931,13 +5563,13 @@
               <a:t>4</a:t>
             </a:r>
             <a:r>
-              <a:rPr lang="en-US" sz="2400" b="1" smtClean="0">
+              <a:rPr lang="en-US" sz="2400" b="1">
                 <a:latin typeface="Consolas" panose="020B0609020204030204" pitchFamily="49" charset="0"/>
               </a:rPr>
               <a:t> * (</a:t>
             </a:r>
             <a:r>
-              <a:rPr lang="en-US" sz="2400" b="1" smtClean="0">
+              <a:rPr lang="en-US" sz="2400" b="1">
                 <a:solidFill>
                   <a:srgbClr val="0070C0"/>
                 </a:solidFill>
@@ -5946,13 +5578,13 @@
               <a:t>return</a:t>
             </a:r>
             <a:r>
-              <a:rPr lang="en-US" sz="2400" b="1" smtClean="0">
+              <a:rPr lang="en-US" sz="2400" b="1">
                 <a:latin typeface="Consolas" panose="020B0609020204030204" pitchFamily="49" charset="0"/>
               </a:rPr>
               <a:t> (</a:t>
             </a:r>
             <a:r>
-              <a:rPr lang="en-US" sz="2400" b="1" smtClean="0">
+              <a:rPr lang="en-US" sz="2400" b="1">
                 <a:solidFill>
                   <a:srgbClr val="00B0F0"/>
                 </a:solidFill>
@@ -5961,33 +5593,21 @@
               <a:t>3</a:t>
             </a:r>
             <a:r>
-              <a:rPr lang="en-US" sz="2400" b="1" smtClean="0">
-                <a:latin typeface="Consolas" panose="020B0609020204030204" pitchFamily="49" charset="0"/>
-              </a:rPr>
-              <a:t> </a:t>
-            </a:r>
-            <a:r>
               <a:rPr lang="en-US" sz="2400" b="1">
                 <a:latin typeface="Consolas" panose="020B0609020204030204" pitchFamily="49" charset="0"/>
               </a:rPr>
-              <a:t>&lt;= 1) ? 1 : </a:t>
-            </a:r>
-            <a:r>
-              <a:rPr lang="en-US" sz="2400" b="1" smtClean="0">
-                <a:latin typeface="Consolas" panose="020B0609020204030204" pitchFamily="49" charset="0"/>
-              </a:rPr>
-              <a:t>6));</a:t>
-            </a:r>
-          </a:p>
-          <a:p>
-            <a:pPr marL="0" indent="0">
-              <a:spcBef>
-                <a:spcPts val="0"/>
-              </a:spcBef>
-              <a:buNone/>
-            </a:pPr>
-            <a:r>
-              <a:rPr lang="en-US" sz="2400" b="1" smtClean="0">
+              <a:t> &lt;= 1) ? 1 : 6));</a:t>
+            </a:r>
+          </a:p>
+          <a:p>
+            <a:pPr marL="0" indent="0">
+              <a:spcBef>
+                <a:spcPts val="0"/>
+              </a:spcBef>
+              <a:buNone/>
+            </a:pPr>
+            <a:r>
+              <a:rPr lang="en-US" sz="2400" b="1">
                 <a:latin typeface="Consolas" panose="020B0609020204030204" pitchFamily="49" charset="0"/>
               </a:rPr>
               <a:t>}</a:t>
@@ -6011,7 +5631,7 @@
             <a:pPr marL="0" indent="0">
               <a:buNone/>
             </a:pPr>
-            <a:endParaRPr lang="da-DK" sz="2000" b="1" smtClean="0">
+            <a:endParaRPr lang="da-DK" sz="2000" b="1">
               <a:solidFill>
                 <a:srgbClr val="0070C0"/>
               </a:solidFill>
@@ -6042,13 +5662,6 @@
       </p:transition>
     </mc:Fallback>
   </mc:AlternateContent>
-  <p:timing>
-    <p:tnLst>
-      <p:par>
-        <p:cTn id="1" dur="indefinite" restart="never" nodeType="tmRoot"/>
-      </p:par>
-    </p:tnLst>
-  </p:timing>
 </p:sld>
 </file>
 
@@ -6071,7 +5684,13 @@
       </p:grpSpPr>
       <p:pic>
         <p:nvPicPr>
-          <p:cNvPr id="4" name="Billede 3"/>
+          <p:cNvPr id="2" name="Billede 1">
+            <a:extLst>
+              <a:ext uri="{FF2B5EF4-FFF2-40B4-BE49-F238E27FC236}">
+                <a16:creationId xmlns:a16="http://schemas.microsoft.com/office/drawing/2014/main" id="{29AAEFF2-AB6E-46CA-8DCA-215B3B51B719}"/>
+              </a:ext>
+            </a:extLst>
+          </p:cNvPr>
           <p:cNvPicPr>
             <a:picLocks noChangeAspect="1"/>
           </p:cNvPicPr>
@@ -6085,53 +5704,12 @@
         </p:blipFill>
         <p:spPr>
           <a:xfrm>
-            <a:off x="1033965" y="503572"/>
-            <a:ext cx="5970446" cy="3749592"/>
+            <a:off x="0" y="1277913"/>
+            <a:ext cx="12192000" cy="4302174"/>
           </a:xfrm>
           <a:prstGeom prst="rect">
             <a:avLst/>
           </a:prstGeom>
-        </p:spPr>
-      </p:pic>
-      <p:pic>
-        <p:nvPicPr>
-          <p:cNvPr id="1026" name="Picture 2" descr="Image result for oh i get it its very clever"/>
-          <p:cNvPicPr>
-            <a:picLocks noChangeAspect="1" noChangeArrowheads="1" noCrop="1"/>
-          </p:cNvPicPr>
-          <p:nvPr/>
-        </p:nvPicPr>
-        <p:blipFill>
-          <a:blip r:embed="rId3">
-            <a:extLst>
-              <a:ext uri="{28A0092B-C50C-407E-A947-70E740481C1C}">
-                <a14:useLocalDpi xmlns:a14="http://schemas.microsoft.com/office/drawing/2010/main" val="0"/>
-              </a:ext>
-            </a:extLst>
-          </a:blip>
-          <a:srcRect/>
-          <a:stretch>
-            <a:fillRect/>
-          </a:stretch>
-        </p:blipFill>
-        <p:spPr bwMode="auto">
-          <a:xfrm>
-            <a:off x="6237538" y="3719596"/>
-            <a:ext cx="4762500" cy="1952625"/>
-          </a:xfrm>
-          <a:prstGeom prst="rect">
-            <a:avLst/>
-          </a:prstGeom>
-          <a:noFill/>
-          <a:extLst>
-            <a:ext uri="{909E8E84-426E-40DD-AFC4-6F175D3DCCD1}">
-              <a14:hiddenFill xmlns:a14="http://schemas.microsoft.com/office/drawing/2010/main">
-                <a:solidFill>
-                  <a:srgbClr val="FFFFFF"/>
-                </a:solidFill>
-              </a14:hiddenFill>
-            </a:ext>
-          </a:extLst>
         </p:spPr>
       </p:pic>
     </p:spTree>
@@ -6144,92 +5722,6 @@
   <p:clrMapOvr>
     <a:masterClrMapping/>
   </p:clrMapOvr>
-  <p:timing>
-    <p:tnLst>
-      <p:par>
-        <p:cTn id="1" dur="indefinite" restart="never" nodeType="tmRoot">
-          <p:childTnLst>
-            <p:seq concurrent="1" nextAc="seek">
-              <p:cTn id="2" dur="indefinite" nodeType="mainSeq">
-                <p:childTnLst>
-                  <p:par>
-                    <p:cTn id="3" fill="hold">
-                      <p:stCondLst>
-                        <p:cond delay="indefinite"/>
-                        <p:cond evt="onBegin" delay="0">
-                          <p:tn val="2"/>
-                        </p:cond>
-                      </p:stCondLst>
-                      <p:childTnLst>
-                        <p:par>
-                          <p:cTn id="4" fill="hold">
-                            <p:stCondLst>
-                              <p:cond delay="0"/>
-                            </p:stCondLst>
-                            <p:childTnLst>
-                              <p:par>
-                                <p:cTn id="5" presetID="10" presetClass="entr" presetSubtype="0" fill="hold" nodeType="afterEffect">
-                                  <p:stCondLst>
-                                    <p:cond delay="3000"/>
-                                  </p:stCondLst>
-                                  <p:childTnLst>
-                                    <p:set>
-                                      <p:cBhvr>
-                                        <p:cTn id="6" dur="1" fill="hold">
-                                          <p:stCondLst>
-                                            <p:cond delay="0"/>
-                                          </p:stCondLst>
-                                        </p:cTn>
-                                        <p:tgtEl>
-                                          <p:spTgt spid="1026"/>
-                                        </p:tgtEl>
-                                        <p:attrNameLst>
-                                          <p:attrName>style.visibility</p:attrName>
-                                        </p:attrNameLst>
-                                      </p:cBhvr>
-                                      <p:to>
-                                        <p:strVal val="visible"/>
-                                      </p:to>
-                                    </p:set>
-                                    <p:animEffect transition="in" filter="fade">
-                                      <p:cBhvr>
-                                        <p:cTn id="7" dur="500"/>
-                                        <p:tgtEl>
-                                          <p:spTgt spid="1026"/>
-                                        </p:tgtEl>
-                                      </p:cBhvr>
-                                    </p:animEffect>
-                                  </p:childTnLst>
-                                </p:cTn>
-                              </p:par>
-                            </p:childTnLst>
-                          </p:cTn>
-                        </p:par>
-                      </p:childTnLst>
-                    </p:cTn>
-                  </p:par>
-                </p:childTnLst>
-              </p:cTn>
-              <p:prevCondLst>
-                <p:cond evt="onPrev" delay="0">
-                  <p:tgtEl>
-                    <p:sldTgt/>
-                  </p:tgtEl>
-                </p:cond>
-              </p:prevCondLst>
-              <p:nextCondLst>
-                <p:cond evt="onNext" delay="0">
-                  <p:tgtEl>
-                    <p:sldTgt/>
-                  </p:tgtEl>
-                </p:cond>
-              </p:nextCondLst>
-            </p:seq>
-          </p:childTnLst>
-        </p:cTn>
-      </p:par>
-    </p:tnLst>
-  </p:timing>
 </p:sld>
 </file>
 
@@ -6279,7 +5771,7 @@
               <a:buNone/>
             </a:pPr>
             <a:r>
-              <a:rPr lang="en-US" sz="2400" b="1" smtClean="0">
+              <a:rPr lang="en-US" sz="2400" b="1">
                 <a:solidFill>
                   <a:srgbClr val="0070C0"/>
                 </a:solidFill>
@@ -6288,13 +5780,13 @@
               <a:t>public int </a:t>
             </a:r>
             <a:r>
-              <a:rPr lang="en-US" sz="2400" b="1" smtClean="0">
+              <a:rPr lang="en-US" sz="2400" b="1">
                 <a:latin typeface="Consolas" panose="020B0609020204030204" pitchFamily="49" charset="0"/>
               </a:rPr>
               <a:t>Factorial(</a:t>
             </a:r>
             <a:r>
-              <a:rPr lang="en-US" sz="2400" b="1" smtClean="0">
+              <a:rPr lang="en-US" sz="2400" b="1">
                 <a:solidFill>
                   <a:srgbClr val="FF0000"/>
                 </a:solidFill>
@@ -6303,7 +5795,7 @@
               <a:t>4</a:t>
             </a:r>
             <a:r>
-              <a:rPr lang="en-US" sz="2400" b="1" smtClean="0">
+              <a:rPr lang="en-US" sz="2400" b="1">
                 <a:latin typeface="Consolas" panose="020B0609020204030204" pitchFamily="49" charset="0"/>
               </a:rPr>
               <a:t>)</a:t>
@@ -6320,7 +5812,7 @@
               <a:buNone/>
             </a:pPr>
             <a:r>
-              <a:rPr lang="en-US" sz="2400" b="1" smtClean="0">
+              <a:rPr lang="en-US" sz="2400" b="1">
                 <a:latin typeface="Consolas" panose="020B0609020204030204" pitchFamily="49" charset="0"/>
               </a:rPr>
               <a:t>{</a:t>
@@ -6337,16 +5829,10 @@
               <a:rPr lang="en-US" sz="2400" b="1">
                 <a:latin typeface="Consolas" panose="020B0609020204030204" pitchFamily="49" charset="0"/>
               </a:rPr>
-              <a:t> </a:t>
-            </a:r>
-            <a:r>
-              <a:rPr lang="en-US" sz="2400" b="1" smtClean="0">
-                <a:latin typeface="Consolas" panose="020B0609020204030204" pitchFamily="49" charset="0"/>
-              </a:rPr>
-              <a:t>   </a:t>
-            </a:r>
-            <a:r>
-              <a:rPr lang="en-US" sz="2400" b="1" smtClean="0">
+              <a:t>    </a:t>
+            </a:r>
+            <a:r>
+              <a:rPr lang="en-US" sz="2400" b="1">
                 <a:solidFill>
                   <a:srgbClr val="0070C0"/>
                 </a:solidFill>
@@ -6355,7 +5841,7 @@
               <a:t>return</a:t>
             </a:r>
             <a:r>
-              <a:rPr lang="en-US" sz="2400" b="1" smtClean="0">
+              <a:rPr lang="en-US" sz="2400" b="1">
                 <a:latin typeface="Consolas" panose="020B0609020204030204" pitchFamily="49" charset="0"/>
               </a:rPr>
               <a:t> (</a:t>
@@ -6370,7 +5856,7 @@
               <a:t>4</a:t>
             </a:r>
             <a:r>
-              <a:rPr lang="en-US" sz="2400" b="1" smtClean="0">
+              <a:rPr lang="en-US" sz="2400" b="1">
                 <a:latin typeface="Consolas" panose="020B0609020204030204" pitchFamily="49" charset="0"/>
               </a:rPr>
               <a:t> &lt;= 1) ? 1 : (</a:t>
@@ -6385,7 +5871,7 @@
               <a:t>4</a:t>
             </a:r>
             <a:r>
-              <a:rPr lang="en-US" sz="2400" b="1" smtClean="0">
+              <a:rPr lang="en-US" sz="2400" b="1">
                 <a:latin typeface="Consolas" panose="020B0609020204030204" pitchFamily="49" charset="0"/>
               </a:rPr>
               <a:t> * 6));</a:t>
@@ -6399,7 +5885,7 @@
               <a:buNone/>
             </a:pPr>
             <a:r>
-              <a:rPr lang="en-US" sz="2400" b="1" smtClean="0">
+              <a:rPr lang="en-US" sz="2400" b="1">
                 <a:latin typeface="Consolas" panose="020B0609020204030204" pitchFamily="49" charset="0"/>
               </a:rPr>
               <a:t>}</a:t>
@@ -6423,7 +5909,7 @@
             <a:pPr marL="0" indent="0">
               <a:buNone/>
             </a:pPr>
-            <a:endParaRPr lang="da-DK" sz="2000" b="1" smtClean="0">
+            <a:endParaRPr lang="da-DK" sz="2000" b="1">
               <a:solidFill>
                 <a:srgbClr val="0070C0"/>
               </a:solidFill>
@@ -6454,13 +5940,6 @@
       </p:transition>
     </mc:Fallback>
   </mc:AlternateContent>
-  <p:timing>
-    <p:tnLst>
-      <p:par>
-        <p:cTn id="1" dur="indefinite" restart="never" nodeType="tmRoot"/>
-      </p:par>
-    </p:tnLst>
-  </p:timing>
 </p:sld>
 </file>
 
@@ -6510,7 +5989,7 @@
               <a:buNone/>
             </a:pPr>
             <a:r>
-              <a:rPr lang="en-US" sz="2400" b="1" smtClean="0">
+              <a:rPr lang="en-US" sz="2400" b="1">
                 <a:solidFill>
                   <a:srgbClr val="0070C0"/>
                 </a:solidFill>
@@ -6519,13 +5998,13 @@
               <a:t>public int </a:t>
             </a:r>
             <a:r>
-              <a:rPr lang="en-US" sz="2400" b="1" smtClean="0">
+              <a:rPr lang="en-US" sz="2400" b="1">
                 <a:latin typeface="Consolas" panose="020B0609020204030204" pitchFamily="49" charset="0"/>
               </a:rPr>
               <a:t>Factorial(</a:t>
             </a:r>
             <a:r>
-              <a:rPr lang="en-US" sz="2400" b="1" smtClean="0">
+              <a:rPr lang="en-US" sz="2400" b="1">
                 <a:solidFill>
                   <a:srgbClr val="FF0000"/>
                 </a:solidFill>
@@ -6534,7 +6013,7 @@
               <a:t>4</a:t>
             </a:r>
             <a:r>
-              <a:rPr lang="en-US" sz="2400" b="1" smtClean="0">
+              <a:rPr lang="en-US" sz="2400" b="1">
                 <a:latin typeface="Consolas" panose="020B0609020204030204" pitchFamily="49" charset="0"/>
               </a:rPr>
               <a:t>)</a:t>
@@ -6551,7 +6030,7 @@
               <a:buNone/>
             </a:pPr>
             <a:r>
-              <a:rPr lang="en-US" sz="2400" b="1" smtClean="0">
+              <a:rPr lang="en-US" sz="2400" b="1">
                 <a:latin typeface="Consolas" panose="020B0609020204030204" pitchFamily="49" charset="0"/>
               </a:rPr>
               <a:t>{</a:t>
@@ -6568,16 +6047,10 @@
               <a:rPr lang="en-US" sz="2400" b="1">
                 <a:latin typeface="Consolas" panose="020B0609020204030204" pitchFamily="49" charset="0"/>
               </a:rPr>
-              <a:t> </a:t>
-            </a:r>
-            <a:r>
-              <a:rPr lang="en-US" sz="2400" b="1" smtClean="0">
-                <a:latin typeface="Consolas" panose="020B0609020204030204" pitchFamily="49" charset="0"/>
-              </a:rPr>
-              <a:t>   </a:t>
-            </a:r>
-            <a:r>
-              <a:rPr lang="en-US" sz="2400" b="1" smtClean="0">
+              <a:t>    </a:t>
+            </a:r>
+            <a:r>
+              <a:rPr lang="en-US" sz="2400" b="1">
                 <a:solidFill>
                   <a:srgbClr val="0070C0"/>
                 </a:solidFill>
@@ -6586,7 +6059,7 @@
               <a:t>return</a:t>
             </a:r>
             <a:r>
-              <a:rPr lang="en-US" sz="2400" b="1" smtClean="0">
+              <a:rPr lang="en-US" sz="2400" b="1">
                 <a:latin typeface="Consolas" panose="020B0609020204030204" pitchFamily="49" charset="0"/>
               </a:rPr>
               <a:t> (</a:t>
@@ -6601,7 +6074,7 @@
               <a:t>4</a:t>
             </a:r>
             <a:r>
-              <a:rPr lang="en-US" sz="2400" b="1" smtClean="0">
+              <a:rPr lang="en-US" sz="2400" b="1">
                 <a:latin typeface="Consolas" panose="020B0609020204030204" pitchFamily="49" charset="0"/>
               </a:rPr>
               <a:t> &lt;= 1) ? 1 : 24);</a:t>
@@ -6615,7 +6088,7 @@
               <a:buNone/>
             </a:pPr>
             <a:r>
-              <a:rPr lang="en-US" sz="2400" b="1" smtClean="0">
+              <a:rPr lang="en-US" sz="2400" b="1">
                 <a:latin typeface="Consolas" panose="020B0609020204030204" pitchFamily="49" charset="0"/>
               </a:rPr>
               <a:t>}</a:t>
@@ -6639,7 +6112,7 @@
             <a:pPr marL="0" indent="0">
               <a:buNone/>
             </a:pPr>
-            <a:endParaRPr lang="da-DK" sz="2000" b="1" smtClean="0">
+            <a:endParaRPr lang="da-DK" sz="2000" b="1">
               <a:solidFill>
                 <a:srgbClr val="0070C0"/>
               </a:solidFill>
@@ -6670,13 +6143,6 @@
       </p:transition>
     </mc:Fallback>
   </mc:AlternateContent>
-  <p:timing>
-    <p:tnLst>
-      <p:par>
-        <p:cTn id="1" dur="indefinite" restart="never" nodeType="tmRoot"/>
-      </p:par>
-    </p:tnLst>
-  </p:timing>
 </p:sld>
 </file>
 
@@ -6726,7 +6192,7 @@
               <a:buNone/>
             </a:pPr>
             <a:r>
-              <a:rPr lang="en-US" sz="2400" b="1" smtClean="0">
+              <a:rPr lang="en-US" sz="2400" b="1">
                 <a:solidFill>
                   <a:srgbClr val="0070C0"/>
                 </a:solidFill>
@@ -6735,13 +6201,13 @@
               <a:t>public int </a:t>
             </a:r>
             <a:r>
-              <a:rPr lang="en-US" sz="2400" b="1" smtClean="0">
+              <a:rPr lang="en-US" sz="2400" b="1">
                 <a:latin typeface="Consolas" panose="020B0609020204030204" pitchFamily="49" charset="0"/>
               </a:rPr>
               <a:t>Factorial(</a:t>
             </a:r>
             <a:r>
-              <a:rPr lang="en-US" sz="2400" b="1" smtClean="0">
+              <a:rPr lang="en-US" sz="2400" b="1">
                 <a:solidFill>
                   <a:srgbClr val="FF0000"/>
                 </a:solidFill>
@@ -6750,7 +6216,7 @@
               <a:t>4</a:t>
             </a:r>
             <a:r>
-              <a:rPr lang="en-US" sz="2400" b="1" smtClean="0">
+              <a:rPr lang="en-US" sz="2400" b="1">
                 <a:latin typeface="Consolas" panose="020B0609020204030204" pitchFamily="49" charset="0"/>
               </a:rPr>
               <a:t>)</a:t>
@@ -6767,7 +6233,7 @@
               <a:buNone/>
             </a:pPr>
             <a:r>
-              <a:rPr lang="en-US" sz="2400" b="1" smtClean="0">
+              <a:rPr lang="en-US" sz="2400" b="1">
                 <a:latin typeface="Consolas" panose="020B0609020204030204" pitchFamily="49" charset="0"/>
               </a:rPr>
               <a:t>{</a:t>
@@ -6784,16 +6250,10 @@
               <a:rPr lang="en-US" sz="2400" b="1">
                 <a:latin typeface="Consolas" panose="020B0609020204030204" pitchFamily="49" charset="0"/>
               </a:rPr>
-              <a:t> </a:t>
-            </a:r>
-            <a:r>
-              <a:rPr lang="en-US" sz="2400" b="1" smtClean="0">
-                <a:latin typeface="Consolas" panose="020B0609020204030204" pitchFamily="49" charset="0"/>
-              </a:rPr>
-              <a:t>   </a:t>
-            </a:r>
-            <a:r>
-              <a:rPr lang="en-US" sz="2400" b="1" smtClean="0">
+              <a:t>    </a:t>
+            </a:r>
+            <a:r>
+              <a:rPr lang="en-US" sz="2400" b="1">
                 <a:solidFill>
                   <a:srgbClr val="0070C0"/>
                 </a:solidFill>
@@ -6802,7 +6262,7 @@
               <a:t>return</a:t>
             </a:r>
             <a:r>
-              <a:rPr lang="en-US" sz="2400" b="1" smtClean="0">
+              <a:rPr lang="en-US" sz="2400" b="1">
                 <a:latin typeface="Consolas" panose="020B0609020204030204" pitchFamily="49" charset="0"/>
               </a:rPr>
               <a:t> 24;</a:t>
@@ -6816,7 +6276,7 @@
               <a:buNone/>
             </a:pPr>
             <a:r>
-              <a:rPr lang="en-US" sz="2400" b="1" smtClean="0">
+              <a:rPr lang="en-US" sz="2400" b="1">
                 <a:latin typeface="Consolas" panose="020B0609020204030204" pitchFamily="49" charset="0"/>
               </a:rPr>
               <a:t>}</a:t>
@@ -6840,7 +6300,7 @@
             <a:pPr marL="0" indent="0">
               <a:buNone/>
             </a:pPr>
-            <a:endParaRPr lang="da-DK" sz="2000" b="1" smtClean="0">
+            <a:endParaRPr lang="da-DK" sz="2000" b="1">
               <a:solidFill>
                 <a:srgbClr val="0070C0"/>
               </a:solidFill>
@@ -6871,13 +6331,6 @@
       </p:transition>
     </mc:Fallback>
   </mc:AlternateContent>
-  <p:timing>
-    <p:tnLst>
-      <p:par>
-        <p:cTn id="1" dur="indefinite" restart="never" nodeType="tmRoot"/>
-      </p:par>
-    </p:tnLst>
-  </p:timing>
 </p:sld>
 </file>
 
@@ -6943,13 +6396,6 @@
   <p:clrMapOvr>
     <a:masterClrMapping/>
   </p:clrMapOvr>
-  <p:timing>
-    <p:tnLst>
-      <p:par>
-        <p:cTn id="1" dur="indefinite" restart="never" nodeType="tmRoot"/>
-      </p:par>
-    </p:tnLst>
-  </p:timing>
 </p:sld>
 </file>
 
@@ -6991,10 +6437,9 @@
           <a:lstStyle/>
           <a:p>
             <a:r>
-              <a:rPr lang="da-DK" b="1" smtClean="0"/>
+              <a:rPr lang="da-DK" b="1"/>
               <a:t>Parts of a Recursive definition (Towers of Hanoi)</a:t>
             </a:r>
-            <a:endParaRPr lang="da-DK" b="1"/>
           </a:p>
         </p:txBody>
       </p:sp>
@@ -7044,7 +6489,7 @@
               <a:t>A division strategy</a:t>
             </a:r>
             <a:r>
-              <a:rPr lang="en-US" smtClean="0"/>
+              <a:rPr lang="en-US"/>
               <a:t>:</a:t>
             </a:r>
             <a:endParaRPr lang="da-DK"/>
@@ -7129,13 +6574,6 @@
   <p:clrMapOvr>
     <a:masterClrMapping/>
   </p:clrMapOvr>
-  <p:timing>
-    <p:tnLst>
-      <p:par>
-        <p:cTn id="1" dur="indefinite" restart="never" nodeType="tmRoot"/>
-      </p:par>
-    </p:tnLst>
-  </p:timing>
 </p:sld>
 </file>
 
@@ -7185,13 +6623,19 @@
               <a:buNone/>
             </a:pPr>
             <a:r>
-              <a:rPr lang="en-US" sz="1800" b="1" smtClean="0">
+              <a:rPr lang="en-US" sz="1800" b="1">
                 <a:solidFill>
                   <a:srgbClr val="0070C0"/>
                 </a:solidFill>
                 <a:latin typeface="Consolas" panose="020B0609020204030204" pitchFamily="49" charset="0"/>
               </a:rPr>
-              <a:t>public </a:t>
+              <a:t>public void </a:t>
+            </a:r>
+            <a:r>
+              <a:rPr lang="en-US" sz="1800" b="1">
+                <a:latin typeface="Consolas" panose="020B0609020204030204" pitchFamily="49" charset="0"/>
+              </a:rPr>
+              <a:t>TowersOfHanoi(</a:t>
             </a:r>
             <a:r>
               <a:rPr lang="en-US" sz="1800" b="1">
@@ -7200,13 +6644,13 @@
                 </a:solidFill>
                 <a:latin typeface="Consolas" panose="020B0609020204030204" pitchFamily="49" charset="0"/>
               </a:rPr>
-              <a:t>void </a:t>
-            </a:r>
-            <a:r>
-              <a:rPr lang="en-US" sz="1800" b="1">
-                <a:latin typeface="Consolas" panose="020B0609020204030204" pitchFamily="49" charset="0"/>
-              </a:rPr>
-              <a:t>TowersOfHanoi(</a:t>
+              <a:t>string</a:t>
+            </a:r>
+            <a:r>
+              <a:rPr lang="en-US" sz="1800" b="1">
+                <a:latin typeface="Consolas" panose="020B0609020204030204" pitchFamily="49" charset="0"/>
+              </a:rPr>
+              <a:t> source, </a:t>
             </a:r>
             <a:r>
               <a:rPr lang="en-US" sz="1800" b="1">
@@ -7221,19 +6665,7 @@
               <a:rPr lang="en-US" sz="1800" b="1">
                 <a:latin typeface="Consolas" panose="020B0609020204030204" pitchFamily="49" charset="0"/>
               </a:rPr>
-              <a:t> </a:t>
-            </a:r>
-            <a:r>
-              <a:rPr lang="en-US" sz="1800" b="1" smtClean="0">
-                <a:latin typeface="Consolas" panose="020B0609020204030204" pitchFamily="49" charset="0"/>
-              </a:rPr>
-              <a:t>source</a:t>
-            </a:r>
-            <a:r>
-              <a:rPr lang="en-US" sz="1800" b="1" smtClean="0">
-                <a:latin typeface="Consolas" panose="020B0609020204030204" pitchFamily="49" charset="0"/>
-              </a:rPr>
-              <a:t>, </a:t>
+              <a:t> extra, </a:t>
             </a:r>
             <a:r>
               <a:rPr lang="en-US" sz="1800" b="1">
@@ -7245,16 +6677,10 @@
               <a:t>string</a:t>
             </a:r>
             <a:r>
-              <a:rPr lang="en-US" sz="1800" b="1" smtClean="0">
-                <a:latin typeface="Consolas" panose="020B0609020204030204" pitchFamily="49" charset="0"/>
-              </a:rPr>
-              <a:t> </a:t>
-            </a:r>
-            <a:r>
-              <a:rPr lang="en-US" sz="1800" b="1" smtClean="0">
-                <a:latin typeface="Consolas" panose="020B0609020204030204" pitchFamily="49" charset="0"/>
-              </a:rPr>
-              <a:t>extra, </a:t>
+              <a:rPr lang="en-US" sz="1800" b="1">
+                <a:latin typeface="Consolas" panose="020B0609020204030204" pitchFamily="49" charset="0"/>
+              </a:rPr>
+              <a:t> target, </a:t>
             </a:r>
             <a:r>
               <a:rPr lang="en-US" sz="1800" b="1">
@@ -7263,40 +6689,13 @@
                 </a:solidFill>
                 <a:latin typeface="Consolas" panose="020B0609020204030204" pitchFamily="49" charset="0"/>
               </a:rPr>
-              <a:t>string</a:t>
-            </a:r>
-            <a:r>
-              <a:rPr lang="en-US" sz="1800" b="1" smtClean="0">
-                <a:latin typeface="Consolas" panose="020B0609020204030204" pitchFamily="49" charset="0"/>
-              </a:rPr>
-              <a:t> </a:t>
-            </a:r>
-            <a:r>
-              <a:rPr lang="en-US" sz="1800" b="1" smtClean="0">
-                <a:latin typeface="Consolas" panose="020B0609020204030204" pitchFamily="49" charset="0"/>
-              </a:rPr>
-              <a:t>target, </a:t>
-            </a:r>
-            <a:r>
-              <a:rPr lang="en-US" sz="1800" b="1" smtClean="0">
-                <a:solidFill>
-                  <a:srgbClr val="0070C0"/>
-                </a:solidFill>
-                <a:latin typeface="Consolas" panose="020B0609020204030204" pitchFamily="49" charset="0"/>
-              </a:rPr>
               <a:t>int</a:t>
             </a:r>
             <a:r>
-              <a:rPr lang="en-US" sz="1800" b="1" smtClean="0">
-                <a:latin typeface="Consolas" panose="020B0609020204030204" pitchFamily="49" charset="0"/>
-              </a:rPr>
-              <a:t> </a:t>
-            </a:r>
-            <a:r>
-              <a:rPr lang="en-US" sz="1800" b="1">
-                <a:latin typeface="Consolas" panose="020B0609020204030204" pitchFamily="49" charset="0"/>
-              </a:rPr>
-              <a:t>n)</a:t>
+              <a:rPr lang="en-US" sz="1800" b="1">
+                <a:latin typeface="Consolas" panose="020B0609020204030204" pitchFamily="49" charset="0"/>
+              </a:rPr>
+              <a:t> n)</a:t>
             </a:r>
             <a:endParaRPr lang="da-DK" sz="1800" b="1">
               <a:latin typeface="Consolas" panose="020B0609020204030204" pitchFamily="49" charset="0"/>
@@ -7327,7 +6726,7 @@
               <a:buNone/>
             </a:pPr>
             <a:r>
-              <a:rPr lang="en-US" sz="1800" b="1" smtClean="0">
+              <a:rPr lang="en-US" sz="1800" b="1">
                 <a:latin typeface="Consolas" panose="020B0609020204030204" pitchFamily="49" charset="0"/>
               </a:rPr>
               <a:t>    </a:t>
@@ -7342,16 +6741,10 @@
               <a:t>if</a:t>
             </a:r>
             <a:r>
-              <a:rPr lang="en-US" sz="1800" b="1" smtClean="0">
-                <a:latin typeface="Consolas" panose="020B0609020204030204" pitchFamily="49" charset="0"/>
-              </a:rPr>
-              <a:t> </a:t>
-            </a:r>
-            <a:r>
-              <a:rPr lang="en-US" sz="1800" b="1">
-                <a:latin typeface="Consolas" panose="020B0609020204030204" pitchFamily="49" charset="0"/>
-              </a:rPr>
-              <a:t>(n &gt; 0)</a:t>
+              <a:rPr lang="en-US" sz="1800" b="1">
+                <a:latin typeface="Consolas" panose="020B0609020204030204" pitchFamily="49" charset="0"/>
+              </a:rPr>
+              <a:t> (n &gt; 0)</a:t>
             </a:r>
             <a:endParaRPr lang="da-DK" sz="1800" b="1">
               <a:latin typeface="Consolas" panose="020B0609020204030204" pitchFamily="49" charset="0"/>
@@ -7365,7 +6758,7 @@
               <a:buNone/>
             </a:pPr>
             <a:r>
-              <a:rPr lang="en-US" sz="1800" b="1" smtClean="0">
+              <a:rPr lang="en-US" sz="1800" b="1">
                 <a:latin typeface="Consolas" panose="020B0609020204030204" pitchFamily="49" charset="0"/>
               </a:rPr>
               <a:t>    {</a:t>
@@ -7382,34 +6775,10 @@
               <a:buNone/>
             </a:pPr>
             <a:r>
-              <a:rPr lang="en-US" sz="1800" b="1" smtClean="0">
-                <a:latin typeface="Consolas" panose="020B0609020204030204" pitchFamily="49" charset="0"/>
-              </a:rPr>
-              <a:t> </a:t>
-            </a:r>
-            <a:r>
-              <a:rPr lang="en-US" sz="1800" b="1">
-                <a:latin typeface="Consolas" panose="020B0609020204030204" pitchFamily="49" charset="0"/>
-              </a:rPr>
-              <a:t>       TowersOfHanoi(source</a:t>
-            </a:r>
-            <a:r>
-              <a:rPr lang="en-US" sz="1800" b="1">
-                <a:latin typeface="Consolas" panose="020B0609020204030204" pitchFamily="49" charset="0"/>
-              </a:rPr>
-              <a:t>, </a:t>
-            </a:r>
-            <a:r>
-              <a:rPr lang="en-US" sz="1800" b="1">
-                <a:latin typeface="Consolas" panose="020B0609020204030204" pitchFamily="49" charset="0"/>
-              </a:rPr>
-              <a:t>target, extra, </a:t>
-            </a:r>
-            <a:r>
-              <a:rPr lang="en-US" sz="1800" b="1">
-                <a:latin typeface="Consolas" panose="020B0609020204030204" pitchFamily="49" charset="0"/>
-              </a:rPr>
-              <a:t>n - 1);</a:t>
+              <a:rPr lang="en-US" sz="1800" b="1">
+                <a:latin typeface="Consolas" panose="020B0609020204030204" pitchFamily="49" charset="0"/>
+              </a:rPr>
+              <a:t>        TowersOfHanoi(source, target, extra, n - 1);</a:t>
             </a:r>
             <a:endParaRPr lang="da-DK" sz="1800" b="1">
               <a:latin typeface="Consolas" panose="020B0609020204030204" pitchFamily="49" charset="0"/>
@@ -7423,22 +6792,10 @@
               <a:buNone/>
             </a:pPr>
             <a:r>
-              <a:rPr lang="en-US" sz="1800" b="1" smtClean="0">
-                <a:latin typeface="Consolas" panose="020B0609020204030204" pitchFamily="49" charset="0"/>
-              </a:rPr>
-              <a:t>        </a:t>
-            </a:r>
-            <a:r>
-              <a:rPr lang="en-US" sz="1800" b="1">
-                <a:latin typeface="Consolas" panose="020B0609020204030204" pitchFamily="49" charset="0"/>
-              </a:rPr>
-              <a:t>Console.WriteLine</a:t>
-            </a:r>
-            <a:r>
-              <a:rPr lang="en-US" sz="1800" b="1">
-                <a:latin typeface="Consolas" panose="020B0609020204030204" pitchFamily="49" charset="0"/>
-              </a:rPr>
-              <a:t> (</a:t>
+              <a:rPr lang="en-US" sz="1800" b="1">
+                <a:latin typeface="Consolas" panose="020B0609020204030204" pitchFamily="49" charset="0"/>
+              </a:rPr>
+              <a:t>        Console.WriteLine (</a:t>
             </a:r>
             <a:r>
               <a:rPr lang="en-US" sz="1800" b="1">
@@ -7512,34 +6869,10 @@
               <a:buNone/>
             </a:pPr>
             <a:r>
-              <a:rPr lang="en-US" sz="1800" b="1" smtClean="0">
-                <a:latin typeface="Consolas" panose="020B0609020204030204" pitchFamily="49" charset="0"/>
-              </a:rPr>
-              <a:t>        </a:t>
-            </a:r>
-            <a:r>
-              <a:rPr lang="en-US" sz="1800" b="1">
-                <a:latin typeface="Consolas" panose="020B0609020204030204" pitchFamily="49" charset="0"/>
-              </a:rPr>
-              <a:t>TowersOfHanoi(extra, source</a:t>
-            </a:r>
-            <a:r>
-              <a:rPr lang="en-US" sz="1800" b="1">
-                <a:latin typeface="Consolas" panose="020B0609020204030204" pitchFamily="49" charset="0"/>
-              </a:rPr>
-              <a:t>, </a:t>
-            </a:r>
-            <a:r>
-              <a:rPr lang="en-US" sz="1800" b="1">
-                <a:latin typeface="Consolas" panose="020B0609020204030204" pitchFamily="49" charset="0"/>
-              </a:rPr>
-              <a:t>target, </a:t>
-            </a:r>
-            <a:r>
-              <a:rPr lang="en-US" sz="1800" b="1">
-                <a:latin typeface="Consolas" panose="020B0609020204030204" pitchFamily="49" charset="0"/>
-              </a:rPr>
-              <a:t>n - 1);</a:t>
+              <a:rPr lang="en-US" sz="1800" b="1">
+                <a:latin typeface="Consolas" panose="020B0609020204030204" pitchFamily="49" charset="0"/>
+              </a:rPr>
+              <a:t>        TowersOfHanoi(extra, source, target, n - 1);</a:t>
             </a:r>
             <a:endParaRPr lang="da-DK" sz="1800" b="1">
               <a:latin typeface="Consolas" panose="020B0609020204030204" pitchFamily="49" charset="0"/>
@@ -7553,7 +6886,7 @@
               <a:buNone/>
             </a:pPr>
             <a:r>
-              <a:rPr lang="en-US" sz="1800" b="1" smtClean="0">
+              <a:rPr lang="en-US" sz="1800" b="1">
                 <a:latin typeface="Consolas" panose="020B0609020204030204" pitchFamily="49" charset="0"/>
               </a:rPr>
               <a:t>    }</a:t>
@@ -7583,14 +6916,6 @@
             <a:pPr marL="0" indent="0">
               <a:buNone/>
             </a:pPr>
-            <a:endParaRPr lang="en-US" sz="1400" b="1" smtClean="0">
-              <a:latin typeface="Consolas" panose="020B0609020204030204" pitchFamily="49" charset="0"/>
-            </a:endParaRPr>
-          </a:p>
-          <a:p>
-            <a:pPr marL="0" indent="0">
-              <a:buNone/>
-            </a:pPr>
             <a:endParaRPr lang="en-US" sz="1400" b="1">
               <a:latin typeface="Consolas" panose="020B0609020204030204" pitchFamily="49" charset="0"/>
             </a:endParaRPr>
@@ -7599,7 +6924,7 @@
             <a:pPr marL="0" indent="0">
               <a:buNone/>
             </a:pPr>
-            <a:endParaRPr lang="en-US" sz="1400" b="1" smtClean="0">
+            <a:endParaRPr lang="en-US" sz="1400" b="1">
               <a:latin typeface="Consolas" panose="020B0609020204030204" pitchFamily="49" charset="0"/>
             </a:endParaRPr>
           </a:p>
@@ -7607,7 +6932,15 @@
             <a:pPr marL="0" indent="0">
               <a:buNone/>
             </a:pPr>
-            <a:endParaRPr lang="da-DK" sz="1400" b="1" smtClean="0">
+            <a:endParaRPr lang="en-US" sz="1400" b="1">
+              <a:latin typeface="Consolas" panose="020B0609020204030204" pitchFamily="49" charset="0"/>
+            </a:endParaRPr>
+          </a:p>
+          <a:p>
+            <a:pPr marL="0" indent="0">
+              <a:buNone/>
+            </a:pPr>
+            <a:endParaRPr lang="da-DK" sz="1400" b="1">
               <a:solidFill>
                 <a:srgbClr val="0070C0"/>
               </a:solidFill>
@@ -7618,7 +6951,7 @@
             <a:pPr marL="0" indent="0">
               <a:buNone/>
             </a:pPr>
-            <a:endParaRPr lang="da-DK" sz="1400" b="1" smtClean="0">
+            <a:endParaRPr lang="da-DK" sz="1400" b="1">
               <a:solidFill>
                 <a:srgbClr val="0070C0"/>
               </a:solidFill>
@@ -7637,21 +6970,6 @@
   <p:clrMapOvr>
     <a:masterClrMapping/>
   </p:clrMapOvr>
-  <mc:AlternateContent xmlns:mc="http://schemas.openxmlformats.org/markup-compatibility/2006" xmlns:p14="http://schemas.microsoft.com/office/powerpoint/2010/main">
-    <mc:Choice Requires="p14">
-      <p:transition p14:dur="0"/>
-    </mc:Choice>
-    <mc:Fallback xmlns="">
-      <p:transition/>
-    </mc:Fallback>
-  </mc:AlternateContent>
-  <p:timing>
-    <p:tnLst>
-      <p:par>
-        <p:cTn id="1" dur="indefinite" restart="never" nodeType="tmRoot"/>
-      </p:par>
-    </p:tnLst>
-  </p:timing>
 </p:sld>
 </file>
 
@@ -7688,10 +7006,9 @@
           <a:lstStyle/>
           <a:p>
             <a:r>
-              <a:rPr lang="da-DK" b="1" smtClean="0"/>
+              <a:rPr lang="da-DK" b="1"/>
               <a:t>Fibonacci</a:t>
             </a:r>
-            <a:endParaRPr lang="da-DK" b="1"/>
           </a:p>
         </p:txBody>
       </p:sp>
@@ -7716,66 +7033,57 @@
           <a:lstStyle/>
           <a:p>
             <a:r>
-              <a:rPr lang="da-DK" b="1" smtClean="0"/>
-              <a:t>Fibonacci</a:t>
-            </a:r>
-            <a:r>
-              <a:rPr lang="da-DK" smtClean="0"/>
-              <a:t>(1) = 1</a:t>
-            </a:r>
-          </a:p>
-          <a:p>
-            <a:r>
-              <a:rPr lang="da-DK" b="1" smtClean="0"/>
-              <a:t>Fibonacci</a:t>
-            </a:r>
-            <a:r>
-              <a:rPr lang="da-DK" smtClean="0"/>
-              <a:t>(2) </a:t>
-            </a:r>
-            <a:r>
-              <a:rPr lang="da-DK"/>
-              <a:t>= 1</a:t>
-            </a:r>
-          </a:p>
-          <a:p>
-            <a:r>
               <a:rPr lang="da-DK" b="1"/>
               <a:t>Fibonacci</a:t>
             </a:r>
             <a:r>
-              <a:rPr lang="da-DK" smtClean="0"/>
-              <a:t>(</a:t>
-            </a:r>
-            <a:r>
-              <a:rPr lang="da-DK" b="1" smtClean="0"/>
-              <a:t>n</a:t>
-            </a:r>
-            <a:r>
-              <a:rPr lang="da-DK" smtClean="0"/>
-              <a:t>) = </a:t>
-            </a:r>
-            <a:r>
-              <a:rPr lang="da-DK" b="1" smtClean="0"/>
-              <a:t>Fibonacci</a:t>
-            </a:r>
-            <a:r>
-              <a:rPr lang="da-DK" smtClean="0"/>
-              <a:t>(n – 1) + </a:t>
-            </a:r>
+              <a:rPr lang="da-DK"/>
+              <a:t>(1) = 1</a:t>
+            </a:r>
+          </a:p>
+          <a:p>
             <a:r>
               <a:rPr lang="da-DK" b="1"/>
               <a:t>Fibonacci</a:t>
             </a:r>
             <a:r>
               <a:rPr lang="da-DK"/>
-              <a:t>(n – </a:t>
-            </a:r>
-            <a:r>
-              <a:rPr lang="da-DK" smtClean="0"/>
-              <a:t>2)</a:t>
-            </a:r>
-            <a:endParaRPr lang="da-DK"/>
+              <a:t>(2) = 1</a:t>
+            </a:r>
+          </a:p>
+          <a:p>
+            <a:r>
+              <a:rPr lang="da-DK" b="1"/>
+              <a:t>Fibonacci</a:t>
+            </a:r>
+            <a:r>
+              <a:rPr lang="da-DK"/>
+              <a:t>(</a:t>
+            </a:r>
+            <a:r>
+              <a:rPr lang="da-DK" b="1"/>
+              <a:t>n</a:t>
+            </a:r>
+            <a:r>
+              <a:rPr lang="da-DK"/>
+              <a:t>) = </a:t>
+            </a:r>
+            <a:r>
+              <a:rPr lang="da-DK" b="1"/>
+              <a:t>Fibonacci</a:t>
+            </a:r>
+            <a:r>
+              <a:rPr lang="da-DK"/>
+              <a:t>(n – 1) + </a:t>
+            </a:r>
+            <a:r>
+              <a:rPr lang="da-DK" b="1"/>
+              <a:t>Fibonacci</a:t>
+            </a:r>
+            <a:r>
+              <a:rPr lang="da-DK"/>
+              <a:t>(n – 2)</a:t>
+            </a:r>
           </a:p>
         </p:txBody>
       </p:sp>
@@ -7789,13 +7097,6 @@
   <p:clrMapOvr>
     <a:masterClrMapping/>
   </p:clrMapOvr>
-  <p:timing>
-    <p:tnLst>
-      <p:par>
-        <p:cTn id="1" dur="indefinite" restart="never" nodeType="tmRoot"/>
-      </p:par>
-    </p:tnLst>
-  </p:timing>
 </p:sld>
 </file>
 
@@ -7845,7 +7146,7 @@
               <a:buNone/>
             </a:pPr>
             <a:r>
-              <a:rPr lang="en-US" sz="3200" b="1" smtClean="0">
+              <a:rPr lang="en-US" sz="3200" b="1">
                 <a:solidFill>
                   <a:srgbClr val="0070C0"/>
                 </a:solidFill>
@@ -7854,13 +7155,13 @@
               <a:t>public int </a:t>
             </a:r>
             <a:r>
-              <a:rPr lang="en-US" sz="3200" b="1" smtClean="0">
+              <a:rPr lang="en-US" sz="3200" b="1">
                 <a:latin typeface="Consolas" panose="020B0609020204030204" pitchFamily="49" charset="0"/>
               </a:rPr>
               <a:t>Fibonacci(</a:t>
             </a:r>
             <a:r>
-              <a:rPr lang="en-US" sz="3200" b="1" smtClean="0">
+              <a:rPr lang="en-US" sz="3200" b="1">
                 <a:solidFill>
                   <a:srgbClr val="0070C0"/>
                 </a:solidFill>
@@ -7869,7 +7170,7 @@
               <a:t>int</a:t>
             </a:r>
             <a:r>
-              <a:rPr lang="en-US" sz="3200" b="1" smtClean="0">
+              <a:rPr lang="en-US" sz="3200" b="1">
                 <a:latin typeface="Consolas" panose="020B0609020204030204" pitchFamily="49" charset="0"/>
               </a:rPr>
               <a:t> n)</a:t>
@@ -7886,7 +7187,7 @@
               <a:buNone/>
             </a:pPr>
             <a:r>
-              <a:rPr lang="en-US" sz="3200" b="1" smtClean="0">
+              <a:rPr lang="en-US" sz="3200" b="1">
                 <a:latin typeface="Consolas" panose="020B0609020204030204" pitchFamily="49" charset="0"/>
               </a:rPr>
               <a:t>{</a:t>
@@ -7903,16 +7204,10 @@
               <a:rPr lang="en-US" sz="3200" b="1">
                 <a:latin typeface="Consolas" panose="020B0609020204030204" pitchFamily="49" charset="0"/>
               </a:rPr>
-              <a:t> </a:t>
-            </a:r>
-            <a:r>
-              <a:rPr lang="en-US" sz="3200" b="1" smtClean="0">
-                <a:latin typeface="Consolas" panose="020B0609020204030204" pitchFamily="49" charset="0"/>
-              </a:rPr>
-              <a:t>   </a:t>
-            </a:r>
-            <a:r>
-              <a:rPr lang="en-US" sz="3200" b="1" smtClean="0">
+              <a:t>    </a:t>
+            </a:r>
+            <a:r>
+              <a:rPr lang="en-US" sz="3200" b="1">
                 <a:solidFill>
                   <a:srgbClr val="0070C0"/>
                 </a:solidFill>
@@ -7921,7 +7216,7 @@
               <a:t>return</a:t>
             </a:r>
             <a:r>
-              <a:rPr lang="en-US" sz="3200" b="1" smtClean="0">
+              <a:rPr lang="en-US" sz="3200" b="1">
                 <a:latin typeface="Consolas" panose="020B0609020204030204" pitchFamily="49" charset="0"/>
               </a:rPr>
               <a:t> (n &lt; 3) ? </a:t>
@@ -7938,13 +7233,7 @@
               <a:rPr lang="en-US" sz="3200" b="1">
                 <a:latin typeface="Consolas" panose="020B0609020204030204" pitchFamily="49" charset="0"/>
               </a:rPr>
-              <a:t> </a:t>
-            </a:r>
-            <a:r>
-              <a:rPr lang="en-US" sz="3200" b="1" smtClean="0">
-                <a:latin typeface="Consolas" panose="020B0609020204030204" pitchFamily="49" charset="0"/>
-              </a:rPr>
-              <a:t>       1 : </a:t>
+              <a:t>        1 : </a:t>
             </a:r>
           </a:p>
           <a:p>
@@ -7958,24 +7247,18 @@
               <a:rPr lang="en-US" sz="3200" b="1">
                 <a:latin typeface="Consolas" panose="020B0609020204030204" pitchFamily="49" charset="0"/>
               </a:rPr>
-              <a:t> </a:t>
-            </a:r>
-            <a:r>
-              <a:rPr lang="en-US" sz="3200" b="1" smtClean="0">
-                <a:latin typeface="Consolas" panose="020B0609020204030204" pitchFamily="49" charset="0"/>
-              </a:rPr>
-              <a:t>       Fibonacci(n – 1) + Fibonacci(n - 2);</a:t>
-            </a:r>
-          </a:p>
-          <a:p>
-            <a:pPr marL="0" indent="0">
-              <a:spcBef>
-                <a:spcPts val="0"/>
-              </a:spcBef>
-              <a:buNone/>
-            </a:pPr>
-            <a:r>
-              <a:rPr lang="en-US" sz="3200" b="1" smtClean="0">
+              <a:t>        Fibonacci(n – 1) + Fibonacci(n - 2);</a:t>
+            </a:r>
+          </a:p>
+          <a:p>
+            <a:pPr marL="0" indent="0">
+              <a:spcBef>
+                <a:spcPts val="0"/>
+              </a:spcBef>
+              <a:buNone/>
+            </a:pPr>
+            <a:r>
+              <a:rPr lang="en-US" sz="3200" b="1">
                 <a:latin typeface="Consolas" panose="020B0609020204030204" pitchFamily="49" charset="0"/>
               </a:rPr>
               <a:t>}</a:t>
@@ -7999,7 +7282,7 @@
             <a:pPr marL="0" indent="0">
               <a:buNone/>
             </a:pPr>
-            <a:endParaRPr lang="da-DK" sz="2000" b="1" smtClean="0">
+            <a:endParaRPr lang="da-DK" sz="2000" b="1">
               <a:solidFill>
                 <a:srgbClr val="0070C0"/>
               </a:solidFill>
@@ -8196,13 +7479,6 @@
   <p:clrMapOvr>
     <a:masterClrMapping/>
   </p:clrMapOvr>
-  <p:timing>
-    <p:tnLst>
-      <p:par>
-        <p:cTn id="1" dur="indefinite" restart="never" nodeType="tmRoot"/>
-      </p:par>
-    </p:tnLst>
-  </p:timing>
 </p:sld>
 </file>
 
@@ -8239,10 +7515,9 @@
           <a:lstStyle/>
           <a:p>
             <a:r>
-              <a:rPr lang="da-DK" b="1" smtClean="0"/>
+              <a:rPr lang="da-DK" b="1"/>
               <a:t>Recursion usefulness</a:t>
             </a:r>
-            <a:endParaRPr lang="da-DK" b="1"/>
           </a:p>
         </p:txBody>
       </p:sp>
@@ -8337,10 +7612,9 @@
           <a:lstStyle/>
           <a:p>
             <a:r>
-              <a:rPr lang="da-DK" smtClean="0"/>
+              <a:rPr lang="da-DK"/>
               <a:t>More efficient</a:t>
             </a:r>
-            <a:endParaRPr lang="da-DK"/>
           </a:p>
         </p:txBody>
       </p:sp>
@@ -8367,10 +7641,9 @@
           <a:lstStyle/>
           <a:p>
             <a:r>
-              <a:rPr lang="da-DK" smtClean="0"/>
+              <a:rPr lang="da-DK"/>
               <a:t>Less efficient</a:t>
             </a:r>
-            <a:endParaRPr lang="da-DK"/>
           </a:p>
         </p:txBody>
       </p:sp>
@@ -8397,10 +7670,9 @@
           <a:lstStyle/>
           <a:p>
             <a:r>
-              <a:rPr lang="da-DK" smtClean="0"/>
+              <a:rPr lang="da-DK"/>
               <a:t>Easier to code</a:t>
             </a:r>
-            <a:endParaRPr lang="da-DK"/>
           </a:p>
         </p:txBody>
       </p:sp>
@@ -8427,10 +7699,9 @@
           <a:lstStyle/>
           <a:p>
             <a:r>
-              <a:rPr lang="da-DK" smtClean="0"/>
+              <a:rPr lang="da-DK"/>
               <a:t>Harder to code</a:t>
             </a:r>
-            <a:endParaRPr lang="da-DK"/>
           </a:p>
         </p:txBody>
       </p:sp>
@@ -8477,18 +7748,13 @@
           <a:p>
             <a:pPr algn="ctr"/>
             <a:r>
-              <a:rPr lang="da-DK" sz="2400" smtClean="0">
+              <a:rPr lang="da-DK" sz="2400">
                 <a:solidFill>
                   <a:schemeClr val="tx1"/>
                 </a:solidFill>
               </a:rPr>
               <a:t>Faculty</a:t>
             </a:r>
-            <a:endParaRPr lang="da-DK" sz="2400">
-              <a:solidFill>
-                <a:schemeClr val="tx1"/>
-              </a:solidFill>
-            </a:endParaRPr>
           </a:p>
         </p:txBody>
       </p:sp>
@@ -8534,7 +7800,7 @@
           <a:p>
             <a:pPr algn="ctr"/>
             <a:r>
-              <a:rPr lang="da-DK" sz="2400" smtClean="0">
+              <a:rPr lang="da-DK" sz="2400">
                 <a:solidFill>
                   <a:schemeClr val="bg1">
                     <a:lumMod val="95000"/>
@@ -8543,13 +7809,6 @@
               </a:rPr>
               <a:t>ToH</a:t>
             </a:r>
-            <a:endParaRPr lang="da-DK" sz="2400">
-              <a:solidFill>
-                <a:schemeClr val="bg1">
-                  <a:lumMod val="95000"/>
-                </a:schemeClr>
-              </a:solidFill>
-            </a:endParaRPr>
           </a:p>
         </p:txBody>
       </p:sp>
@@ -8593,7 +7852,7 @@
           <a:p>
             <a:pPr algn="ctr"/>
             <a:r>
-              <a:rPr lang="da-DK" sz="2400" smtClean="0">
+              <a:rPr lang="da-DK" sz="2400">
                 <a:solidFill>
                   <a:schemeClr val="bg1">
                     <a:lumMod val="95000"/>
@@ -8602,13 +7861,6 @@
               </a:rPr>
               <a:t>Fibonacci</a:t>
             </a:r>
-            <a:endParaRPr lang="da-DK" sz="2400">
-              <a:solidFill>
-                <a:schemeClr val="bg1">
-                  <a:lumMod val="95000"/>
-                </a:schemeClr>
-              </a:solidFill>
-            </a:endParaRPr>
           </a:p>
         </p:txBody>
       </p:sp>
@@ -8870,13 +8122,6 @@
   <p:clrMapOvr>
     <a:masterClrMapping/>
   </p:clrMapOvr>
-  <p:timing>
-    <p:tnLst>
-      <p:par>
-        <p:cTn id="1" dur="indefinite" restart="never" nodeType="tmRoot"/>
-      </p:par>
-    </p:tnLst>
-  </p:timing>
 </p:sld>
 </file>
 
@@ -8913,10 +8158,9 @@
           <a:lstStyle/>
           <a:p>
             <a:r>
-              <a:rPr lang="da-DK" b="1" smtClean="0"/>
+              <a:rPr lang="da-DK" b="1"/>
               <a:t>Recursion summary</a:t>
             </a:r>
-            <a:endParaRPr lang="da-DK" b="1"/>
           </a:p>
         </p:txBody>
       </p:sp>
@@ -8941,19 +8185,19 @@
           <a:lstStyle/>
           <a:p>
             <a:r>
-              <a:rPr lang="da-DK" smtClean="0"/>
+              <a:rPr lang="da-DK"/>
               <a:t>Not a silver bullet!</a:t>
             </a:r>
           </a:p>
           <a:p>
             <a:r>
-              <a:rPr lang="da-DK" smtClean="0"/>
+              <a:rPr lang="da-DK"/>
               <a:t>Useful if problem has a natural recursive formulation, and/or non-recursive formulation is much more complex</a:t>
             </a:r>
           </a:p>
           <a:p>
             <a:r>
-              <a:rPr lang="da-DK" smtClean="0"/>
+              <a:rPr lang="da-DK"/>
               <a:t>Beware of efficiency</a:t>
             </a:r>
           </a:p>
@@ -9026,13 +8270,6 @@
   <p:clrMapOvr>
     <a:masterClrMapping/>
   </p:clrMapOvr>
-  <p:timing>
-    <p:tnLst>
-      <p:par>
-        <p:cTn id="1" dur="indefinite" restart="never" nodeType="tmRoot"/>
-      </p:par>
-    </p:tnLst>
-  </p:timing>
 </p:sld>
 </file>
 
@@ -9082,22 +8319,13 @@
               <a:buNone/>
             </a:pPr>
             <a:r>
-              <a:rPr lang="en-US" sz="3200" b="1" smtClean="0">
+              <a:rPr lang="en-US" sz="3200" b="1">
                 <a:solidFill>
                   <a:srgbClr val="0070C0"/>
                 </a:solidFill>
                 <a:latin typeface="Consolas" panose="020B0609020204030204" pitchFamily="49" charset="0"/>
               </a:rPr>
-              <a:t>public </a:t>
-            </a:r>
-            <a:r>
-              <a:rPr lang="en-US" sz="3200" b="1">
-                <a:solidFill>
-                  <a:srgbClr val="0070C0"/>
-                </a:solidFill>
-                <a:latin typeface="Consolas" panose="020B0609020204030204" pitchFamily="49" charset="0"/>
-              </a:rPr>
-              <a:t>void </a:t>
+              <a:t>public void </a:t>
             </a:r>
             <a:r>
               <a:rPr lang="en-US" sz="3200" b="1">
@@ -9134,13 +8362,13 @@
               <a:buNone/>
             </a:pPr>
             <a:r>
-              <a:rPr lang="en-US" sz="3200" b="1" smtClean="0">
+              <a:rPr lang="en-US" sz="3200" b="1">
                 <a:latin typeface="Consolas" panose="020B0609020204030204" pitchFamily="49" charset="0"/>
               </a:rPr>
               <a:t>    </a:t>
             </a:r>
             <a:r>
-              <a:rPr lang="en-US" sz="3200" b="1" smtClean="0">
+              <a:rPr lang="en-US" sz="3200" b="1">
                 <a:solidFill>
                   <a:schemeClr val="accent6">
                     <a:lumMod val="75000"/>
@@ -9151,16 +8379,10 @@
               <a:t>Console</a:t>
             </a:r>
             <a:r>
-              <a:rPr lang="en-US" sz="3200" b="1" smtClean="0">
-                <a:latin typeface="Consolas" panose="020B0609020204030204" pitchFamily="49" charset="0"/>
-              </a:rPr>
-              <a:t>.WriteLine</a:t>
-            </a:r>
-            <a:r>
               <a:rPr lang="en-US" sz="3200" b="1">
                 <a:latin typeface="Consolas" panose="020B0609020204030204" pitchFamily="49" charset="0"/>
               </a:rPr>
-              <a:t>(</a:t>
+              <a:t>.WriteLine(</a:t>
             </a:r>
             <a:r>
               <a:rPr lang="en-US" sz="3200" b="1">
@@ -9189,16 +8411,10 @@
               <a:buNone/>
             </a:pPr>
             <a:r>
-              <a:rPr lang="en-US" sz="3200" b="1" smtClean="0">
-                <a:latin typeface="Consolas" panose="020B0609020204030204" pitchFamily="49" charset="0"/>
-              </a:rPr>
-              <a:t>    PrintHello</a:t>
-            </a:r>
-            <a:r>
               <a:rPr lang="en-US" sz="3200" b="1">
                 <a:latin typeface="Consolas" panose="020B0609020204030204" pitchFamily="49" charset="0"/>
               </a:rPr>
-              <a:t>();</a:t>
+              <a:t>    PrintHello();</a:t>
             </a:r>
             <a:endParaRPr lang="da-DK" sz="3200" b="1">
               <a:latin typeface="Consolas" panose="020B0609020204030204" pitchFamily="49" charset="0"/>
@@ -9236,7 +8452,7 @@
             <a:pPr marL="0" indent="0">
               <a:buNone/>
             </a:pPr>
-            <a:endParaRPr lang="da-DK" sz="2000" b="1" smtClean="0">
+            <a:endParaRPr lang="da-DK" sz="2000" b="1">
               <a:solidFill>
                 <a:srgbClr val="0070C0"/>
               </a:solidFill>
@@ -9428,40 +8644,31 @@
               <a:buNone/>
             </a:pPr>
             <a:r>
-              <a:rPr lang="en-US" sz="3200" b="1" smtClean="0">
+              <a:rPr lang="en-US" sz="3200" b="1">
                 <a:solidFill>
                   <a:srgbClr val="0070C0"/>
                 </a:solidFill>
                 <a:latin typeface="Consolas" panose="020B0609020204030204" pitchFamily="49" charset="0"/>
               </a:rPr>
-              <a:t>public </a:t>
+              <a:t>public void </a:t>
             </a:r>
             <a:r>
               <a:rPr lang="en-US" sz="3200" b="1">
+                <a:latin typeface="Consolas" panose="020B0609020204030204" pitchFamily="49" charset="0"/>
+              </a:rPr>
+              <a:t>PrintHello(</a:t>
+            </a:r>
+            <a:r>
+              <a:rPr lang="en-US" sz="3200" b="1">
                 <a:solidFill>
                   <a:srgbClr val="0070C0"/>
                 </a:solidFill>
                 <a:latin typeface="Consolas" panose="020B0609020204030204" pitchFamily="49" charset="0"/>
               </a:rPr>
-              <a:t>void </a:t>
-            </a:r>
-            <a:r>
-              <a:rPr lang="en-US" sz="3200" b="1" smtClean="0">
-                <a:latin typeface="Consolas" panose="020B0609020204030204" pitchFamily="49" charset="0"/>
-              </a:rPr>
-              <a:t>PrintHello(</a:t>
+              <a:t>int</a:t>
             </a:r>
             <a:r>
               <a:rPr lang="en-US" sz="3200" b="1">
-                <a:solidFill>
-                  <a:srgbClr val="0070C0"/>
-                </a:solidFill>
-                <a:latin typeface="Consolas" panose="020B0609020204030204" pitchFamily="49" charset="0"/>
-              </a:rPr>
-              <a:t>int</a:t>
-            </a:r>
-            <a:r>
-              <a:rPr lang="en-US" sz="3200" b="1" smtClean="0">
                 <a:latin typeface="Consolas" panose="020B0609020204030204" pitchFamily="49" charset="0"/>
               </a:rPr>
               <a:t> callsLeft)</a:t>
@@ -9478,7 +8685,7 @@
               <a:buNone/>
             </a:pPr>
             <a:r>
-              <a:rPr lang="en-US" sz="3200" b="1" smtClean="0">
+              <a:rPr lang="en-US" sz="3200" b="1">
                 <a:latin typeface="Consolas" panose="020B0609020204030204" pitchFamily="49" charset="0"/>
               </a:rPr>
               <a:t>{</a:t>
@@ -9495,13 +8702,7 @@
               <a:rPr lang="en-US" sz="3200" b="1">
                 <a:latin typeface="Consolas" panose="020B0609020204030204" pitchFamily="49" charset="0"/>
               </a:rPr>
-              <a:t> </a:t>
-            </a:r>
-            <a:r>
-              <a:rPr lang="en-US" sz="3200" b="1" smtClean="0">
-                <a:latin typeface="Consolas" panose="020B0609020204030204" pitchFamily="49" charset="0"/>
-              </a:rPr>
-              <a:t>   </a:t>
+              <a:t>    </a:t>
             </a:r>
             <a:r>
               <a:rPr lang="en-US" sz="3200" b="1">
@@ -9513,7 +8714,7 @@
               <a:t>if</a:t>
             </a:r>
             <a:r>
-              <a:rPr lang="en-US" sz="3200" b="1" smtClean="0">
+              <a:rPr lang="en-US" sz="3200" b="1">
                 <a:latin typeface="Consolas" panose="020B0609020204030204" pitchFamily="49" charset="0"/>
               </a:rPr>
               <a:t> (callsLeft &gt; 0)</a:t>
@@ -9527,10 +8728,56 @@
               <a:buNone/>
             </a:pPr>
             <a:r>
-              <a:rPr lang="da-DK" sz="3200" b="1" smtClean="0">
+              <a:rPr lang="da-DK" sz="3200" b="1">
                 <a:latin typeface="Consolas" panose="020B0609020204030204" pitchFamily="49" charset="0"/>
               </a:rPr>
               <a:t>    {</a:t>
+            </a:r>
+          </a:p>
+          <a:p>
+            <a:pPr marL="0" indent="0">
+              <a:spcBef>
+                <a:spcPts val="0"/>
+              </a:spcBef>
+              <a:buNone/>
+            </a:pPr>
+            <a:r>
+              <a:rPr lang="en-US" sz="3200" b="1">
+                <a:latin typeface="Consolas" panose="020B0609020204030204" pitchFamily="49" charset="0"/>
+              </a:rPr>
+              <a:t>        </a:t>
+            </a:r>
+            <a:r>
+              <a:rPr lang="en-US" sz="3200" b="1">
+                <a:solidFill>
+                  <a:schemeClr val="accent6">
+                    <a:lumMod val="75000"/>
+                  </a:schemeClr>
+                </a:solidFill>
+                <a:latin typeface="Consolas" panose="020B0609020204030204" pitchFamily="49" charset="0"/>
+              </a:rPr>
+              <a:t>Console</a:t>
+            </a:r>
+            <a:r>
+              <a:rPr lang="en-US" sz="3200" b="1">
+                <a:latin typeface="Consolas" panose="020B0609020204030204" pitchFamily="49" charset="0"/>
+              </a:rPr>
+              <a:t>.WriteLine(</a:t>
+            </a:r>
+            <a:r>
+              <a:rPr lang="en-US" sz="3200" b="1">
+                <a:solidFill>
+                  <a:srgbClr val="C00000"/>
+                </a:solidFill>
+                <a:latin typeface="Consolas" panose="020B0609020204030204" pitchFamily="49" charset="0"/>
+              </a:rPr>
+              <a:t>"Hello"</a:t>
+            </a:r>
+            <a:r>
+              <a:rPr lang="en-US" sz="3200" b="1">
+                <a:latin typeface="Consolas" panose="020B0609020204030204" pitchFamily="49" charset="0"/>
+              </a:rPr>
+              <a:t>);</a:t>
             </a:r>
             <a:endParaRPr lang="da-DK" sz="3200" b="1">
               <a:latin typeface="Consolas" panose="020B0609020204030204" pitchFamily="49" charset="0"/>
@@ -9544,48 +8791,24 @@
               <a:buNone/>
             </a:pPr>
             <a:r>
-              <a:rPr lang="en-US" sz="3200" b="1" smtClean="0">
-                <a:latin typeface="Consolas" panose="020B0609020204030204" pitchFamily="49" charset="0"/>
-              </a:rPr>
-              <a:t>        </a:t>
-            </a:r>
-            <a:r>
-              <a:rPr lang="en-US" sz="3200" b="1" smtClean="0">
-                <a:solidFill>
-                  <a:schemeClr val="accent6">
-                    <a:lumMod val="75000"/>
-                  </a:schemeClr>
-                </a:solidFill>
-                <a:latin typeface="Consolas" panose="020B0609020204030204" pitchFamily="49" charset="0"/>
-              </a:rPr>
-              <a:t>Console</a:t>
-            </a:r>
-            <a:r>
-              <a:rPr lang="en-US" sz="3200" b="1" smtClean="0">
-                <a:latin typeface="Consolas" panose="020B0609020204030204" pitchFamily="49" charset="0"/>
-              </a:rPr>
-              <a:t>.WriteLine</a:t>
-            </a:r>
-            <a:r>
               <a:rPr lang="en-US" sz="3200" b="1">
                 <a:latin typeface="Consolas" panose="020B0609020204030204" pitchFamily="49" charset="0"/>
               </a:rPr>
-              <a:t>(</a:t>
-            </a:r>
+              <a:t>        PrintHello(callsLeft - 1);</a:t>
+            </a:r>
+          </a:p>
+          <a:p>
+            <a:pPr marL="0" indent="0">
+              <a:spcBef>
+                <a:spcPts val="0"/>
+              </a:spcBef>
+              <a:buNone/>
+            </a:pPr>
             <a:r>
               <a:rPr lang="en-US" sz="3200" b="1">
-                <a:solidFill>
-                  <a:srgbClr val="C00000"/>
-                </a:solidFill>
-                <a:latin typeface="Consolas" panose="020B0609020204030204" pitchFamily="49" charset="0"/>
-              </a:rPr>
-              <a:t>"Hello"</a:t>
-            </a:r>
-            <a:r>
-              <a:rPr lang="en-US" sz="3200" b="1">
-                <a:latin typeface="Consolas" panose="020B0609020204030204" pitchFamily="49" charset="0"/>
-              </a:rPr>
-              <a:t>);</a:t>
+                <a:latin typeface="Consolas" panose="020B0609020204030204" pitchFamily="49" charset="0"/>
+              </a:rPr>
+              <a:t>    }</a:t>
             </a:r>
             <a:endParaRPr lang="da-DK" sz="3200" b="1">
               <a:latin typeface="Consolas" panose="020B0609020204030204" pitchFamily="49" charset="0"/>
@@ -9599,30 +8822,10 @@
               <a:buNone/>
             </a:pPr>
             <a:r>
-              <a:rPr lang="en-US" sz="3200" b="1" smtClean="0">
-                <a:latin typeface="Consolas" panose="020B0609020204030204" pitchFamily="49" charset="0"/>
-              </a:rPr>
-              <a:t>        PrintHello(callsLeft - 1);</a:t>
-            </a:r>
-          </a:p>
-          <a:p>
-            <a:pPr marL="0" indent="0">
-              <a:spcBef>
-                <a:spcPts val="0"/>
-              </a:spcBef>
-              <a:buNone/>
-            </a:pPr>
-            <a:r>
               <a:rPr lang="en-US" sz="3200" b="1">
                 <a:latin typeface="Consolas" panose="020B0609020204030204" pitchFamily="49" charset="0"/>
               </a:rPr>
-              <a:t> </a:t>
-            </a:r>
-            <a:r>
-              <a:rPr lang="en-US" sz="3200" b="1" smtClean="0">
-                <a:latin typeface="Consolas" panose="020B0609020204030204" pitchFamily="49" charset="0"/>
-              </a:rPr>
-              <a:t>   }</a:t>
+              <a:t>}</a:t>
             </a:r>
             <a:endParaRPr lang="da-DK" sz="3200" b="1">
               <a:latin typeface="Consolas" panose="020B0609020204030204" pitchFamily="49" charset="0"/>
@@ -9635,23 +8838,6 @@
               </a:spcBef>
               <a:buNone/>
             </a:pPr>
-            <a:r>
-              <a:rPr lang="en-US" sz="3200" b="1">
-                <a:latin typeface="Consolas" panose="020B0609020204030204" pitchFamily="49" charset="0"/>
-              </a:rPr>
-              <a:t>}</a:t>
-            </a:r>
-            <a:endParaRPr lang="da-DK" sz="3200" b="1">
-              <a:latin typeface="Consolas" panose="020B0609020204030204" pitchFamily="49" charset="0"/>
-            </a:endParaRPr>
-          </a:p>
-          <a:p>
-            <a:pPr marL="0" indent="0">
-              <a:spcBef>
-                <a:spcPts val="0"/>
-              </a:spcBef>
-              <a:buNone/>
-            </a:pPr>
             <a:endParaRPr lang="da-DK" sz="2000" b="1">
               <a:latin typeface="Consolas" panose="020B0609020204030204" pitchFamily="49" charset="0"/>
             </a:endParaRPr>
@@ -9660,7 +8846,7 @@
             <a:pPr marL="0" indent="0">
               <a:buNone/>
             </a:pPr>
-            <a:endParaRPr lang="da-DK" sz="2000" b="1" smtClean="0">
+            <a:endParaRPr lang="da-DK" sz="2000" b="1">
               <a:solidFill>
                 <a:srgbClr val="0070C0"/>
               </a:solidFill>
@@ -9691,13 +8877,6 @@
       </p:transition>
     </mc:Fallback>
   </mc:AlternateContent>
-  <p:timing>
-    <p:tnLst>
-      <p:par>
-        <p:cTn id="1" dur="indefinite" restart="never" nodeType="tmRoot"/>
-      </p:par>
-    </p:tnLst>
-  </p:timing>
 </p:sld>
 </file>
 
@@ -9734,10 +8913,9 @@
           <a:lstStyle/>
           <a:p>
             <a:r>
-              <a:rPr lang="da-DK" b="1" smtClean="0"/>
+              <a:rPr lang="da-DK" b="1"/>
               <a:t>Parts of a Recursive definition</a:t>
             </a:r>
-            <a:endParaRPr lang="da-DK" b="1"/>
           </a:p>
         </p:txBody>
       </p:sp>
@@ -9792,11 +8970,7 @@
             </a:r>
             <a:r>
               <a:rPr lang="en-US"/>
-              <a:t>: a way of combining the solutions for the simpler pro­blems into a solution for the original </a:t>
-            </a:r>
-            <a:r>
-              <a:rPr lang="en-US" smtClean="0"/>
-              <a:t>problem</a:t>
+              <a:t>: a way of combining the solutions for the simpler pro­blems into a solution for the original problem</a:t>
             </a:r>
             <a:endParaRPr lang="da-DK"/>
           </a:p>
@@ -9812,13 +8986,6 @@
   <p:clrMapOvr>
     <a:masterClrMapping/>
   </p:clrMapOvr>
-  <p:timing>
-    <p:tnLst>
-      <p:par>
-        <p:cTn id="1" dur="indefinite" restart="never" nodeType="tmRoot"/>
-      </p:par>
-    </p:tnLst>
-  </p:timing>
 </p:sld>
 </file>
 
@@ -9855,10 +9022,9 @@
           <a:lstStyle/>
           <a:p>
             <a:r>
-              <a:rPr lang="da-DK" b="1" smtClean="0"/>
+              <a:rPr lang="da-DK" b="1"/>
               <a:t>Factorial</a:t>
             </a:r>
-            <a:endParaRPr lang="da-DK" b="1"/>
           </a:p>
         </p:txBody>
       </p:sp>
@@ -9883,68 +9049,67 @@
           <a:lstStyle/>
           <a:p>
             <a:r>
-              <a:rPr lang="da-DK" b="1" smtClean="0"/>
+              <a:rPr lang="da-DK" b="1"/>
               <a:t>Factorial</a:t>
             </a:r>
             <a:r>
-              <a:rPr lang="da-DK" smtClean="0"/>
+              <a:rPr lang="da-DK"/>
               <a:t>(</a:t>
             </a:r>
             <a:r>
-              <a:rPr lang="da-DK" b="1" smtClean="0"/>
+              <a:rPr lang="da-DK" b="1"/>
               <a:t>n</a:t>
             </a:r>
             <a:r>
-              <a:rPr lang="da-DK" smtClean="0"/>
+              <a:rPr lang="da-DK"/>
               <a:t>) = n x (n – 1) x (n – 2) x … x 2 x 1</a:t>
             </a:r>
           </a:p>
           <a:p>
             <a:r>
-              <a:rPr lang="da-DK" b="1" smtClean="0"/>
+              <a:rPr lang="da-DK" b="1"/>
               <a:t>Factorial</a:t>
             </a:r>
             <a:r>
-              <a:rPr lang="da-DK" smtClean="0"/>
+              <a:rPr lang="da-DK"/>
               <a:t>(5) = 5 x 4 x 3 x 2 x 1 = 120</a:t>
             </a:r>
           </a:p>
           <a:p>
             <a:r>
-              <a:rPr lang="da-DK" b="1" smtClean="0"/>
+              <a:rPr lang="da-DK" b="1"/>
               <a:t>Factorial</a:t>
             </a:r>
             <a:r>
-              <a:rPr lang="da-DK" smtClean="0"/>
+              <a:rPr lang="da-DK"/>
               <a:t>(1) = 1</a:t>
             </a:r>
           </a:p>
           <a:p>
             <a:r>
-              <a:rPr lang="da-DK" b="1" smtClean="0"/>
+              <a:rPr lang="da-DK" b="1"/>
               <a:t>Factorial</a:t>
             </a:r>
             <a:r>
-              <a:rPr lang="da-DK" smtClean="0"/>
+              <a:rPr lang="da-DK"/>
               <a:t>(</a:t>
             </a:r>
             <a:r>
-              <a:rPr lang="da-DK" b="1" smtClean="0"/>
+              <a:rPr lang="da-DK" b="1"/>
               <a:t>n</a:t>
             </a:r>
             <a:r>
-              <a:rPr lang="da-DK" smtClean="0"/>
+              <a:rPr lang="da-DK"/>
               <a:t>) = n x </a:t>
             </a:r>
             <a:r>
-              <a:rPr lang="da-DK" b="1" smtClean="0"/>
+              <a:rPr lang="da-DK" b="1"/>
               <a:t>Factorial</a:t>
             </a:r>
             <a:r>
-              <a:rPr lang="da-DK" smtClean="0"/>
+              <a:rPr lang="da-DK"/>
               <a:t>(n – 1)</a:t>
             </a:r>
-            <a:endParaRPr lang="da-DK"/>
           </a:p>
         </p:txBody>
       </p:sp>
@@ -9958,13 +9123,6 @@
   <p:clrMapOvr>
     <a:masterClrMapping/>
   </p:clrMapOvr>
-  <p:timing>
-    <p:tnLst>
-      <p:par>
-        <p:cTn id="1" dur="indefinite" restart="never" nodeType="tmRoot"/>
-      </p:par>
-    </p:tnLst>
-  </p:timing>
 </p:sld>
 </file>
 
@@ -10001,10 +9159,9 @@
           <a:lstStyle/>
           <a:p>
             <a:r>
-              <a:rPr lang="da-DK" b="1" smtClean="0"/>
+              <a:rPr lang="da-DK" b="1"/>
               <a:t>Parts of a Recursive definition (Factorial)</a:t>
             </a:r>
-            <a:endParaRPr lang="da-DK" b="1"/>
           </a:p>
         </p:txBody>
       </p:sp>
@@ -10147,13 +9304,6 @@
   <p:clrMapOvr>
     <a:masterClrMapping/>
   </p:clrMapOvr>
-  <p:timing>
-    <p:tnLst>
-      <p:par>
-        <p:cTn id="1" dur="indefinite" restart="never" nodeType="tmRoot"/>
-      </p:par>
-    </p:tnLst>
-  </p:timing>
 </p:sld>
 </file>
 
@@ -10203,7 +9353,7 @@
               <a:buNone/>
             </a:pPr>
             <a:r>
-              <a:rPr lang="en-US" sz="3200" b="1" smtClean="0">
+              <a:rPr lang="en-US" sz="3200" b="1">
                 <a:solidFill>
                   <a:srgbClr val="0070C0"/>
                 </a:solidFill>
@@ -10212,13 +9362,13 @@
               <a:t>public int </a:t>
             </a:r>
             <a:r>
-              <a:rPr lang="en-US" sz="3200" b="1" smtClean="0">
+              <a:rPr lang="en-US" sz="3200" b="1">
                 <a:latin typeface="Consolas" panose="020B0609020204030204" pitchFamily="49" charset="0"/>
               </a:rPr>
               <a:t>Factorial(</a:t>
             </a:r>
             <a:r>
-              <a:rPr lang="en-US" sz="3200" b="1" smtClean="0">
+              <a:rPr lang="en-US" sz="3200" b="1">
                 <a:solidFill>
                   <a:srgbClr val="0070C0"/>
                 </a:solidFill>
@@ -10227,7 +9377,7 @@
               <a:t>int</a:t>
             </a:r>
             <a:r>
-              <a:rPr lang="en-US" sz="3200" b="1" smtClean="0">
+              <a:rPr lang="en-US" sz="3200" b="1">
                 <a:latin typeface="Consolas" panose="020B0609020204030204" pitchFamily="49" charset="0"/>
               </a:rPr>
               <a:t> n)</a:t>
@@ -10244,7 +9394,7 @@
               <a:buNone/>
             </a:pPr>
             <a:r>
-              <a:rPr lang="en-US" sz="3200" b="1" smtClean="0">
+              <a:rPr lang="en-US" sz="3200" b="1">
                 <a:latin typeface="Consolas" panose="020B0609020204030204" pitchFamily="49" charset="0"/>
               </a:rPr>
               <a:t>{</a:t>
@@ -10261,16 +9411,10 @@
               <a:rPr lang="en-US" sz="3200" b="1">
                 <a:latin typeface="Consolas" panose="020B0609020204030204" pitchFamily="49" charset="0"/>
               </a:rPr>
-              <a:t> </a:t>
-            </a:r>
-            <a:r>
-              <a:rPr lang="en-US" sz="3200" b="1" smtClean="0">
-                <a:latin typeface="Consolas" panose="020B0609020204030204" pitchFamily="49" charset="0"/>
-              </a:rPr>
-              <a:t>   </a:t>
-            </a:r>
-            <a:r>
-              <a:rPr lang="en-US" sz="3200" b="1" smtClean="0">
+              <a:t>    </a:t>
+            </a:r>
+            <a:r>
+              <a:rPr lang="en-US" sz="3200" b="1">
                 <a:solidFill>
                   <a:srgbClr val="0070C0"/>
                 </a:solidFill>
@@ -10279,7 +9423,7 @@
               <a:t>return</a:t>
             </a:r>
             <a:r>
-              <a:rPr lang="en-US" sz="3200" b="1" smtClean="0">
+              <a:rPr lang="en-US" sz="3200" b="1">
                 <a:latin typeface="Consolas" panose="020B0609020204030204" pitchFamily="49" charset="0"/>
               </a:rPr>
               <a:t> (n &lt;= 1) ? </a:t>
@@ -10296,13 +9440,7 @@
               <a:rPr lang="en-US" sz="3200" b="1">
                 <a:latin typeface="Consolas" panose="020B0609020204030204" pitchFamily="49" charset="0"/>
               </a:rPr>
-              <a:t> </a:t>
-            </a:r>
-            <a:r>
-              <a:rPr lang="en-US" sz="3200" b="1" smtClean="0">
-                <a:latin typeface="Consolas" panose="020B0609020204030204" pitchFamily="49" charset="0"/>
-              </a:rPr>
-              <a:t>       1 : </a:t>
+              <a:t>        1 : </a:t>
             </a:r>
           </a:p>
           <a:p>
@@ -10316,24 +9454,18 @@
               <a:rPr lang="en-US" sz="3200" b="1">
                 <a:latin typeface="Consolas" panose="020B0609020204030204" pitchFamily="49" charset="0"/>
               </a:rPr>
-              <a:t> </a:t>
-            </a:r>
-            <a:r>
-              <a:rPr lang="en-US" sz="3200" b="1" smtClean="0">
-                <a:latin typeface="Consolas" panose="020B0609020204030204" pitchFamily="49" charset="0"/>
-              </a:rPr>
-              <a:t>       (n * Factorial(n – 1));</a:t>
-            </a:r>
-          </a:p>
-          <a:p>
-            <a:pPr marL="0" indent="0">
-              <a:spcBef>
-                <a:spcPts val="0"/>
-              </a:spcBef>
-              <a:buNone/>
-            </a:pPr>
-            <a:r>
-              <a:rPr lang="en-US" sz="3200" b="1" smtClean="0">
+              <a:t>        (n * Factorial(n – 1));</a:t>
+            </a:r>
+          </a:p>
+          <a:p>
+            <a:pPr marL="0" indent="0">
+              <a:spcBef>
+                <a:spcPts val="0"/>
+              </a:spcBef>
+              <a:buNone/>
+            </a:pPr>
+            <a:r>
+              <a:rPr lang="en-US" sz="3200" b="1">
                 <a:latin typeface="Consolas" panose="020B0609020204030204" pitchFamily="49" charset="0"/>
               </a:rPr>
               <a:t>}</a:t>
@@ -10357,7 +9489,7 @@
             <a:pPr marL="0" indent="0">
               <a:buNone/>
             </a:pPr>
-            <a:endParaRPr lang="da-DK" sz="2000" b="1" smtClean="0">
+            <a:endParaRPr lang="da-DK" sz="2000" b="1">
               <a:solidFill>
                 <a:srgbClr val="0070C0"/>
               </a:solidFill>
@@ -10376,13 +9508,6 @@
   <p:clrMapOvr>
     <a:masterClrMapping/>
   </p:clrMapOvr>
-  <p:timing>
-    <p:tnLst>
-      <p:par>
-        <p:cTn id="1" dur="indefinite" restart="never" nodeType="tmRoot"/>
-      </p:par>
-    </p:tnLst>
-  </p:timing>
 </p:sld>
 </file>
 
